--- a/week_11/week11_day1_security_analytics_foundations.pptx
+++ b/week_11/week11_day1_security_analytics_foundations.pptx
@@ -4,32 +4,35 @@
   <p:sldMasterIdLst>
     <p:sldMasterId id="2147483648" r:id="rId1"/>
   </p:sldMasterIdLst>
+  <p:notesMasterIdLst>
+    <p:notesMasterId r:id="rId25"/>
+  </p:notesMasterIdLst>
   <p:sldIdLst>
-    <p:sldId id="256" r:id="rId7"/>
-    <p:sldId id="257" r:id="rId9"/>
-    <p:sldId id="258" r:id="rId10"/>
-    <p:sldId id="259" r:id="rId11"/>
-    <p:sldId id="260" r:id="rId12"/>
-    <p:sldId id="261" r:id="rId13"/>
-    <p:sldId id="262" r:id="rId14"/>
-    <p:sldId id="263" r:id="rId15"/>
-    <p:sldId id="264" r:id="rId16"/>
-    <p:sldId id="265" r:id="rId17"/>
-    <p:sldId id="266" r:id="rId18"/>
-    <p:sldId id="267" r:id="rId19"/>
-    <p:sldId id="268" r:id="rId20"/>
-    <p:sldId id="269" r:id="rId21"/>
-    <p:sldId id="270" r:id="rId22"/>
-    <p:sldId id="271" r:id="rId23"/>
-    <p:sldId id="272" r:id="rId24"/>
-    <p:sldId id="273" r:id="rId25"/>
-    <p:sldId id="274" r:id="rId26"/>
-    <p:sldId id="275" r:id="rId27"/>
-    <p:sldId id="276" r:id="rId28"/>
-    <p:sldId id="277" r:id="rId29"/>
-    <p:sldId id="278" r:id="rId30"/>
+    <p:sldId id="256" r:id="rId2"/>
+    <p:sldId id="257" r:id="rId3"/>
+    <p:sldId id="258" r:id="rId4"/>
+    <p:sldId id="259" r:id="rId5"/>
+    <p:sldId id="260" r:id="rId6"/>
+    <p:sldId id="261" r:id="rId7"/>
+    <p:sldId id="262" r:id="rId8"/>
+    <p:sldId id="263" r:id="rId9"/>
+    <p:sldId id="264" r:id="rId10"/>
+    <p:sldId id="265" r:id="rId11"/>
+    <p:sldId id="266" r:id="rId12"/>
+    <p:sldId id="267" r:id="rId13"/>
+    <p:sldId id="268" r:id="rId14"/>
+    <p:sldId id="269" r:id="rId15"/>
+    <p:sldId id="270" r:id="rId16"/>
+    <p:sldId id="271" r:id="rId17"/>
+    <p:sldId id="272" r:id="rId18"/>
+    <p:sldId id="273" r:id="rId19"/>
+    <p:sldId id="274" r:id="rId20"/>
+    <p:sldId id="275" r:id="rId21"/>
+    <p:sldId id="276" r:id="rId22"/>
+    <p:sldId id="277" r:id="rId23"/>
+    <p:sldId id="278" r:id="rId24"/>
   </p:sldIdLst>
-  <p:sldSz cx="12191695" cy="6858000" type="screen4x3"/>
+  <p:sldSz cx="12192000" cy="6858000"/>
   <p:notesSz cx="6858000" cy="9144000"/>
   <p:defaultTextStyle>
     <a:defPPr>
@@ -126,11 +129,27 @@
       </a:defRPr>
     </a:lvl9pPr>
   </p:defaultTextStyle>
+  <p:extLst>
+    <p:ext uri="{EFAFB233-063F-42B5-8137-9DF3F51BA10A}">
+      <p15:sldGuideLst xmlns:p15="http://schemas.microsoft.com/office/powerpoint/2012/main">
+        <p15:guide id="1" orient="horz" pos="2160">
+          <p15:clr>
+            <a:srgbClr val="A4A3A4"/>
+          </p15:clr>
+        </p15:guide>
+        <p15:guide id="2" pos="2880">
+          <p15:clr>
+            <a:srgbClr val="A4A3A4"/>
+          </p15:clr>
+        </p15:guide>
+      </p15:sldGuideLst>
+    </p:ext>
+  </p:extLst>
 </p:presentation>
 </file>
 
 <file path=ppt/notesMasters/notesMaster1.xml><?xml version="1.0" encoding="utf-8"?>
-<p:notesMaster xmlns:a="http://schemas.openxmlformats.org/drawingml/2006/main" xmlns:p="http://schemas.openxmlformats.org/presentationml/2006/main" xmlns:r="http://schemas.openxmlformats.org/officeDocument/2006/relationships">
+<p:notesMaster xmlns:a="http://schemas.openxmlformats.org/drawingml/2006/main" xmlns:r="http://schemas.openxmlformats.org/officeDocument/2006/relationships" xmlns:p="http://schemas.openxmlformats.org/presentationml/2006/main">
   <p:cSld>
     <p:bg>
       <p:bgRef idx="1001">
@@ -151,241 +170,16 @@
           <a:chExt cx="0" cy="0"/>
         </a:xfrm>
       </p:grpSpPr>
-      <p:sp>
-        <p:nvSpPr>
-          <p:cNvPr id="2" name="Header Placeholder 1"/>
-          <p:cNvSpPr>
-            <a:spLocks noGrp="1"/>
-          </p:cNvSpPr>
-          <p:nvPr>
-            <p:ph type="hdr" sz="quarter"/>
-          </p:nvPr>
-        </p:nvSpPr>
-        <p:spPr>
-          <a:xfrm>
-            <a:off x="0" y="0"/>
-            <a:ext cx="2971800" cy="457200"/>
-          </a:xfrm>
-          <a:prstGeom prst="rect">
-            <a:avLst/>
-          </a:prstGeom>
-        </p:spPr>
-        <p:txBody>
-          <a:bodyPr vert="horz" lIns="91440" tIns="45720" rIns="91440" bIns="45720" rtlCol="0"/>
-          <a:lstStyle>
-            <a:lvl1pPr algn="l">
-              <a:defRPr sz="1200"/>
-            </a:lvl1pPr>
-          </a:lstStyle>
-          <a:p>
-            <a:endParaRPr lang="en-US"/>
-          </a:p>
-        </p:txBody>
-      </p:sp>
-      <p:sp>
-        <p:nvSpPr>
-          <p:cNvPr id="3" name="Date Placeholder 2"/>
-          <p:cNvSpPr>
-            <a:spLocks noGrp="1"/>
-          </p:cNvSpPr>
-          <p:nvPr>
-            <p:ph type="dt" idx="1"/>
-          </p:nvPr>
-        </p:nvSpPr>
-        <p:spPr>
-          <a:xfrm>
-            <a:off x="3884613" y="0"/>
-            <a:ext cx="2971800" cy="457200"/>
-          </a:xfrm>
-          <a:prstGeom prst="rect">
-            <a:avLst/>
-          </a:prstGeom>
-        </p:spPr>
-        <p:txBody>
-          <a:bodyPr vert="horz" lIns="91440" tIns="45720" rIns="91440" bIns="45720" rtlCol="0"/>
-          <a:lstStyle>
-            <a:lvl1pPr algn="r">
-              <a:defRPr sz="1200"/>
-            </a:lvl1pPr>
-          </a:lstStyle>
-          <a:p>
-            <a:fld id="{0F89C1C7-3DCD-1040-A9CF-14679D8B5DDD}" type="datetimeFigureOut">
-              <a:rPr lang="en-US" smtClean="0"/>
-              <a:t>10/17/16</a:t>
-            </a:fld>
-            <a:endParaRPr lang="en-US"/>
-          </a:p>
-        </p:txBody>
-      </p:sp>
-      <p:sp>
-        <p:nvSpPr>
-          <p:cNvPr id="4" name="Slide Image Placeholder 3"/>
-          <p:cNvSpPr>
-            <a:spLocks noGrp="1" noRot="1" noChangeAspect="1"/>
-          </p:cNvSpPr>
-          <p:nvPr>
-            <p:ph type="sldImg" idx="2"/>
-          </p:nvPr>
-        </p:nvSpPr>
-        <p:spPr>
-          <a:xfrm>
-            <a:off x="1143000" y="685800"/>
-            <a:ext cx="4572000" cy="3429000"/>
-          </a:xfrm>
-          <a:prstGeom prst="rect">
-            <a:avLst/>
-          </a:prstGeom>
-          <a:noFill/>
-          <a:ln w="12700">
-            <a:solidFill>
-              <a:prstClr val="black"/>
-            </a:solidFill>
-          </a:ln>
-        </p:spPr>
-        <p:txBody>
-          <a:bodyPr vert="horz" lIns="91440" tIns="45720" rIns="91440" bIns="45720" rtlCol="0" anchor="ctr"/>
-          <a:lstStyle/>
-          <a:p>
-            <a:endParaRPr lang="en-US"/>
-          </a:p>
-        </p:txBody>
-      </p:sp>
-      <p:sp>
-        <p:nvSpPr>
-          <p:cNvPr id="5" name="Notes Placeholder 4"/>
-          <p:cNvSpPr>
-            <a:spLocks noGrp="1"/>
-          </p:cNvSpPr>
-          <p:nvPr>
-            <p:ph type="body" sz="quarter" idx="3"/>
-          </p:nvPr>
-        </p:nvSpPr>
-        <p:spPr>
-          <a:xfrm>
-            <a:off x="685800" y="4343400"/>
-            <a:ext cx="5486400" cy="4114800"/>
-          </a:xfrm>
-          <a:prstGeom prst="rect">
-            <a:avLst/>
-          </a:prstGeom>
-        </p:spPr>
-        <p:txBody>
-          <a:bodyPr vert="horz" lIns="91440" tIns="45720" rIns="91440" bIns="45720" rtlCol="0"/>
-          <a:lstStyle/>
-          <a:p>
-            <a:pPr lvl="0"/>
-            <a:r>
-              <a:rPr lang="en-US" smtClean="0"/>
-              <a:t>Click to edit Master text styles</a:t>
-            </a:r>
-          </a:p>
-          <a:p>
-            <a:pPr lvl="1"/>
-            <a:r>
-              <a:rPr lang="en-US" smtClean="0"/>
-              <a:t>Second level</a:t>
-            </a:r>
-          </a:p>
-          <a:p>
-            <a:pPr lvl="2"/>
-            <a:r>
-              <a:rPr lang="en-US" smtClean="0"/>
-              <a:t>Third level</a:t>
-            </a:r>
-          </a:p>
-          <a:p>
-            <a:pPr lvl="3"/>
-            <a:r>
-              <a:rPr lang="en-US" smtClean="0"/>
-              <a:t>Fourth level</a:t>
-            </a:r>
-          </a:p>
-          <a:p>
-            <a:pPr lvl="4"/>
-            <a:r>
-              <a:rPr lang="en-US" smtClean="0"/>
-              <a:t>Fifth level</a:t>
-            </a:r>
-            <a:endParaRPr lang="en-US"/>
-          </a:p>
-        </p:txBody>
-      </p:sp>
-      <p:sp>
-        <p:nvSpPr>
-          <p:cNvPr id="6" name="Footer Placeholder 5"/>
-          <p:cNvSpPr>
-            <a:spLocks noGrp="1"/>
-          </p:cNvSpPr>
-          <p:nvPr>
-            <p:ph type="ftr" sz="quarter" idx="4"/>
-          </p:nvPr>
-        </p:nvSpPr>
-        <p:spPr>
-          <a:xfrm>
-            <a:off x="0" y="8685213"/>
-            <a:ext cx="2971800" cy="457200"/>
-          </a:xfrm>
-          <a:prstGeom prst="rect">
-            <a:avLst/>
-          </a:prstGeom>
-        </p:spPr>
-        <p:txBody>
-          <a:bodyPr vert="horz" lIns="91440" tIns="45720" rIns="91440" bIns="45720" rtlCol="0" anchor="b"/>
-          <a:lstStyle>
-            <a:lvl1pPr algn="l">
-              <a:defRPr sz="1200"/>
-            </a:lvl1pPr>
-          </a:lstStyle>
-          <a:p>
-            <a:endParaRPr lang="en-US"/>
-          </a:p>
-        </p:txBody>
-      </p:sp>
-      <p:sp>
-        <p:nvSpPr>
-          <p:cNvPr id="7" name="Slide Number Placeholder 6"/>
-          <p:cNvSpPr>
-            <a:spLocks noGrp="1"/>
-          </p:cNvSpPr>
-          <p:nvPr>
-            <p:ph type="sldNum" sz="quarter" idx="5"/>
-          </p:nvPr>
-        </p:nvSpPr>
-        <p:spPr>
-          <a:xfrm>
-            <a:off x="3884613" y="8685213"/>
-            <a:ext cx="2971800" cy="457200"/>
-          </a:xfrm>
-          <a:prstGeom prst="rect">
-            <a:avLst/>
-          </a:prstGeom>
-        </p:spPr>
-        <p:txBody>
-          <a:bodyPr vert="horz" lIns="91440" tIns="45720" rIns="91440" bIns="45720" rtlCol="0" anchor="b"/>
-          <a:lstStyle>
-            <a:lvl1pPr algn="r">
-              <a:defRPr sz="1200"/>
-            </a:lvl1pPr>
-          </a:lstStyle>
-          <a:p>
-            <a:fld id="{BB5E49A5-4136-284D-997B-48E1D791AD67}" type="slidenum">
-              <a:rPr lang="en-US" smtClean="0"/>
-              <a:t>‹#›</a:t>
-            </a:fld>
-            <a:endParaRPr lang="en-US"/>
-          </a:p>
-        </p:txBody>
-      </p:sp>
     </p:spTree>
     <p:extLst>
       <p:ext uri="{BB962C8B-B14F-4D97-AF65-F5344CB8AC3E}">
-        <p14:creationId xmlns:p14="http://schemas.microsoft.com/office/powerpoint/2010/main" val="2623252185"/>
+        <p14:creationId xmlns:p14="http://schemas.microsoft.com/office/powerpoint/2010/main" val="2668684478"/>
       </p:ext>
     </p:extLst>
   </p:cSld>
   <p:clrMap bg1="lt1" tx1="dk1" bg2="lt2" tx2="dk2" accent1="accent1" accent2="accent2" accent3="accent3" accent4="accent4" accent5="accent5" accent6="accent6" hlink="hlink" folHlink="folHlink"/>
   <p:notesStyle>
-    <a:lvl1pPr marL="0" algn="l" defTabSz="457200" rtl="0" eaLnBrk="1" latinLnBrk="0" hangingPunct="1">
+    <a:lvl1pPr marL="0" algn="l" defTabSz="914400" rtl="0" eaLnBrk="1" latinLnBrk="0" hangingPunct="1">
       <a:defRPr sz="1200" kern="1200">
         <a:solidFill>
           <a:schemeClr val="tx1"/>
@@ -395,7 +189,7 @@
         <a:cs typeface="+mn-cs"/>
       </a:defRPr>
     </a:lvl1pPr>
-    <a:lvl2pPr marL="457200" algn="l" defTabSz="457200" rtl="0" eaLnBrk="1" latinLnBrk="0" hangingPunct="1">
+    <a:lvl2pPr marL="457200" algn="l" defTabSz="914400" rtl="0" eaLnBrk="1" latinLnBrk="0" hangingPunct="1">
       <a:defRPr sz="1200" kern="1200">
         <a:solidFill>
           <a:schemeClr val="tx1"/>
@@ -405,7 +199,7 @@
         <a:cs typeface="+mn-cs"/>
       </a:defRPr>
     </a:lvl2pPr>
-    <a:lvl3pPr marL="914400" algn="l" defTabSz="457200" rtl="0" eaLnBrk="1" latinLnBrk="0" hangingPunct="1">
+    <a:lvl3pPr marL="914400" algn="l" defTabSz="914400" rtl="0" eaLnBrk="1" latinLnBrk="0" hangingPunct="1">
       <a:defRPr sz="1200" kern="1200">
         <a:solidFill>
           <a:schemeClr val="tx1"/>
@@ -415,7 +209,7 @@
         <a:cs typeface="+mn-cs"/>
       </a:defRPr>
     </a:lvl3pPr>
-    <a:lvl4pPr marL="1371600" algn="l" defTabSz="457200" rtl="0" eaLnBrk="1" latinLnBrk="0" hangingPunct="1">
+    <a:lvl4pPr marL="1371600" algn="l" defTabSz="914400" rtl="0" eaLnBrk="1" latinLnBrk="0" hangingPunct="1">
       <a:defRPr sz="1200" kern="1200">
         <a:solidFill>
           <a:schemeClr val="tx1"/>
@@ -425,7 +219,7 @@
         <a:cs typeface="+mn-cs"/>
       </a:defRPr>
     </a:lvl4pPr>
-    <a:lvl5pPr marL="1828800" algn="l" defTabSz="457200" rtl="0" eaLnBrk="1" latinLnBrk="0" hangingPunct="1">
+    <a:lvl5pPr marL="1828800" algn="l" defTabSz="914400" rtl="0" eaLnBrk="1" latinLnBrk="0" hangingPunct="1">
       <a:defRPr sz="1200" kern="1200">
         <a:solidFill>
           <a:schemeClr val="tx1"/>
@@ -435,7 +229,7 @@
         <a:cs typeface="+mn-cs"/>
       </a:defRPr>
     </a:lvl5pPr>
-    <a:lvl6pPr marL="2286000" algn="l" defTabSz="457200" rtl="0" eaLnBrk="1" latinLnBrk="0" hangingPunct="1">
+    <a:lvl6pPr marL="2286000" algn="l" defTabSz="914400" rtl="0" eaLnBrk="1" latinLnBrk="0" hangingPunct="1">
       <a:defRPr sz="1200" kern="1200">
         <a:solidFill>
           <a:schemeClr val="tx1"/>
@@ -445,7 +239,7 @@
         <a:cs typeface="+mn-cs"/>
       </a:defRPr>
     </a:lvl6pPr>
-    <a:lvl7pPr marL="2743200" algn="l" defTabSz="457200" rtl="0" eaLnBrk="1" latinLnBrk="0" hangingPunct="1">
+    <a:lvl7pPr marL="2743200" algn="l" defTabSz="914400" rtl="0" eaLnBrk="1" latinLnBrk="0" hangingPunct="1">
       <a:defRPr sz="1200" kern="1200">
         <a:solidFill>
           <a:schemeClr val="tx1"/>
@@ -455,7 +249,7 @@
         <a:cs typeface="+mn-cs"/>
       </a:defRPr>
     </a:lvl7pPr>
-    <a:lvl8pPr marL="3200400" algn="l" defTabSz="457200" rtl="0" eaLnBrk="1" latinLnBrk="0" hangingPunct="1">
+    <a:lvl8pPr marL="3200400" algn="l" defTabSz="914400" rtl="0" eaLnBrk="1" latinLnBrk="0" hangingPunct="1">
       <a:defRPr sz="1200" kern="1200">
         <a:solidFill>
           <a:schemeClr val="tx1"/>
@@ -465,7 +259,7 @@
         <a:cs typeface="+mn-cs"/>
       </a:defRPr>
     </a:lvl8pPr>
-    <a:lvl9pPr marL="3657600" algn="l" defTabSz="457200" rtl="0" eaLnBrk="1" latinLnBrk="0" hangingPunct="1">
+    <a:lvl9pPr marL="3657600" algn="l" defTabSz="914400" rtl="0" eaLnBrk="1" latinLnBrk="0" hangingPunct="1">
       <a:defRPr sz="1200" kern="1200">
         <a:solidFill>
           <a:schemeClr val="tx1"/>
@@ -480,7 +274,7 @@
 </file>
 
 <file path=ppt/notesSlides/notesSlide1.xml><?xml version="1.0" encoding="utf-8"?>
-<p:notes xmlns:a="http://schemas.openxmlformats.org/drawingml/2006/main" xmlns:p="http://schemas.openxmlformats.org/presentationml/2006/main" xmlns:r="http://schemas.openxmlformats.org/officeDocument/2006/relationships">
+<p:notes xmlns:a="http://schemas.openxmlformats.org/drawingml/2006/main" xmlns:r="http://schemas.openxmlformats.org/officeDocument/2006/relationships" xmlns:p="http://schemas.openxmlformats.org/presentationml/2006/main">
   <p:cSld>
     <p:spTree>
       <p:nvGrpSpPr>
@@ -500,7 +294,7 @@
         <p:nvSpPr>
           <p:cNvPr id="2" name="Slide Image Placeholder 1"/>
           <p:cNvSpPr>
-            <a:spLocks noGrp="1"/>
+            <a:spLocks noGrp="1" noRot="1" noChangeAspect="1"/>
           </p:cNvSpPr>
           <p:nvPr>
             <p:ph type="sldImg" idx="2"/>
@@ -515,7 +309,7 @@
             <a:spLocks noGrp="1"/>
           </p:cNvSpPr>
           <p:nvPr>
-            <p:ph type="body" idx="3" sz="quarter"/>
+            <p:ph type="body" sz="quarter" idx="3"/>
           </p:nvPr>
         </p:nvSpPr>
         <p:spPr/>
@@ -524,32 +318,40 @@
           <a:lstStyle/>
           <a:p>
             <a:r>
+              <a:rPr dirty="0"/>
               <a:t>Script:</a:t>
             </a:r>
           </a:p>
           <a:p>
             <a:r>
+              <a:rPr dirty="0"/>
               <a:t>Today we are starting the syllabus unit on data analytics for security, and I want to begin by stripping the topic down to something practical and real. Security analytics is not just an abstract concept, and it is not only about advanced machine learning or expensive dashboards. At its core, it is about using operational data to make better security decisions. That means reading logs carefully, spotting patterns, bringing in context, and deciding what to do first. This Day 1 lecture is intentionally foundational. I want students to leave knowing how to treat authentication data as evidence rather than noise. I also want them to understand that this is individual analyst work. Much of entry-level security starts exactly here: a person opening raw data, noticing something unusual, and writing a short note that helps the team respond.</a:t>
             </a:r>
           </a:p>
-          <a:p/>
-          <a:p>
-            <a:r>
+          <a:p>
+            <a:endParaRPr dirty="0"/>
+          </a:p>
+          <a:p>
+            <a:r>
+              <a:rPr dirty="0"/>
               <a:t>Mention:</a:t>
             </a:r>
           </a:p>
           <a:p>
             <a:r>
+              <a:rPr dirty="0"/>
               <a:t>- Frame the whole day as practical analytics</a:t>
             </a:r>
           </a:p>
           <a:p>
             <a:r>
+              <a:rPr dirty="0"/>
               <a:t>- Say explicitly that this can fill an hour because each step is a real analyst skill</a:t>
             </a:r>
           </a:p>
           <a:p>
             <a:r>
+              <a:rPr dirty="0"/>
               <a:t>- Reinforce individual work and no group work</a:t>
             </a:r>
           </a:p>
@@ -562,7 +364,7 @@
             <a:spLocks noGrp="1"/>
           </p:cNvSpPr>
           <p:nvPr>
-            <p:ph type="sldNum" idx="5" sz="quarter"/>
+            <p:ph type="sldNum" sz="quarter" idx="5"/>
           </p:nvPr>
         </p:nvSpPr>
         <p:spPr/>
@@ -576,7 +378,7 @@
 </file>
 
 <file path=ppt/notesSlides/notesSlide10.xml><?xml version="1.0" encoding="utf-8"?>
-<p:notes xmlns:a="http://schemas.openxmlformats.org/drawingml/2006/main" xmlns:p="http://schemas.openxmlformats.org/presentationml/2006/main" xmlns:r="http://schemas.openxmlformats.org/officeDocument/2006/relationships">
+<p:notes xmlns:a="http://schemas.openxmlformats.org/drawingml/2006/main" xmlns:r="http://schemas.openxmlformats.org/officeDocument/2006/relationships" xmlns:p="http://schemas.openxmlformats.org/presentationml/2006/main">
   <p:cSld>
     <p:spTree>
       <p:nvGrpSpPr>
@@ -596,7 +398,7 @@
         <p:nvSpPr>
           <p:cNvPr id="2" name="Slide Image Placeholder 1"/>
           <p:cNvSpPr>
-            <a:spLocks noGrp="1"/>
+            <a:spLocks noGrp="1" noRot="1" noChangeAspect="1"/>
           </p:cNvSpPr>
           <p:nvPr>
             <p:ph type="sldImg" idx="2"/>
@@ -611,7 +413,7 @@
             <a:spLocks noGrp="1"/>
           </p:cNvSpPr>
           <p:nvPr>
-            <p:ph type="body" idx="3" sz="quarter"/>
+            <p:ph type="body" sz="quarter" idx="3"/>
           </p:nvPr>
         </p:nvSpPr>
         <p:spPr/>
@@ -620,32 +422,40 @@
           <a:lstStyle/>
           <a:p>
             <a:r>
+              <a:rPr dirty="0"/>
               <a:t>Script:</a:t>
             </a:r>
           </a:p>
           <a:p>
             <a:r>
+              <a:rPr dirty="0"/>
               <a:t>Counts alone are not enough. Order matters. A single failed login may mean very little. But twenty failed logins followed by one success tells a much more interesting story. A password reset followed by an unfamiliar login can be meaningful. A login success followed by MFA trouble can suggest an active adversary or at least a serious authentication issue. Sequence is how we turn static rows into a dynamic narrative. I want students to notice that logs are not just a list. They are a timeline. Once you line up the events in order, you can begin to ask what changed, what escalated, and what happened next. That is one of the biggest conceptual shifts I want from this lecture: seeing event data as a sequence of evidence rather than as disconnected records.</a:t>
             </a:r>
           </a:p>
-          <a:p/>
-          <a:p>
-            <a:r>
+          <a:p>
+            <a:endParaRPr dirty="0"/>
+          </a:p>
+          <a:p>
+            <a:r>
+              <a:rPr dirty="0"/>
               <a:t>Mention:</a:t>
             </a:r>
           </a:p>
           <a:p>
             <a:r>
+              <a:rPr dirty="0"/>
               <a:t>- Emphasize time order</a:t>
             </a:r>
           </a:p>
           <a:p>
             <a:r>
+              <a:rPr dirty="0"/>
               <a:t>- Use success-after-failures as a key example</a:t>
             </a:r>
           </a:p>
           <a:p>
             <a:r>
+              <a:rPr dirty="0"/>
               <a:t>- Introduce the idea of logs as narrative evidence</a:t>
             </a:r>
           </a:p>
@@ -658,7 +468,7 @@
             <a:spLocks noGrp="1"/>
           </p:cNvSpPr>
           <p:nvPr>
-            <p:ph type="sldNum" idx="5" sz="quarter"/>
+            <p:ph type="sldNum" sz="quarter" idx="5"/>
           </p:nvPr>
         </p:nvSpPr>
         <p:spPr/>
@@ -672,7 +482,7 @@
 </file>
 
 <file path=ppt/notesSlides/notesSlide11.xml><?xml version="1.0" encoding="utf-8"?>
-<p:notes xmlns:a="http://schemas.openxmlformats.org/drawingml/2006/main" xmlns:p="http://schemas.openxmlformats.org/presentationml/2006/main" xmlns:r="http://schemas.openxmlformats.org/officeDocument/2006/relationships">
+<p:notes xmlns:a="http://schemas.openxmlformats.org/drawingml/2006/main" xmlns:r="http://schemas.openxmlformats.org/officeDocument/2006/relationships" xmlns:p="http://schemas.openxmlformats.org/presentationml/2006/main">
   <p:cSld>
     <p:spTree>
       <p:nvGrpSpPr>
@@ -692,7 +502,7 @@
         <p:nvSpPr>
           <p:cNvPr id="2" name="Slide Image Placeholder 1"/>
           <p:cNvSpPr>
-            <a:spLocks noGrp="1"/>
+            <a:spLocks noGrp="1" noRot="1" noChangeAspect="1"/>
           </p:cNvSpPr>
           <p:nvPr>
             <p:ph type="sldImg" idx="2"/>
@@ -707,7 +517,7 @@
             <a:spLocks noGrp="1"/>
           </p:cNvSpPr>
           <p:nvPr>
-            <p:ph type="body" idx="3" sz="quarter"/>
+            <p:ph type="body" sz="quarter" idx="3"/>
           </p:nvPr>
         </p:nvSpPr>
         <p:spPr/>
@@ -716,32 +526,40 @@
           <a:lstStyle/>
           <a:p>
             <a:r>
+              <a:rPr dirty="0"/>
               <a:t>Script:</a:t>
             </a:r>
           </a:p>
           <a:p>
             <a:r>
+              <a:rPr dirty="0"/>
               <a:t>The same field can tell very different stories depending on the pattern shape. One user failing once or twice and then succeeding from a familiar device usually looks like a normal mistake. Many attempts against one account can suggest brute force because the attacker is concentrating effort on a single target. One source touching many accounts with a small number of tries each looks more like a password spray. This is a key practical distinction because the response may differ. Brute force against one account can push us toward account-specific action. A spray can push us toward broader source blocking or defensive review across multiple users. Students do not need perfect certainty from the pattern alone, but they do need to learn that shape matters. Security analytics is often about recognizing these structural differences in behavior.</a:t>
             </a:r>
           </a:p>
-          <a:p/>
-          <a:p>
-            <a:r>
+          <a:p>
+            <a:endParaRPr dirty="0"/>
+          </a:p>
+          <a:p>
+            <a:r>
+              <a:rPr dirty="0"/>
               <a:t>Mention:</a:t>
             </a:r>
           </a:p>
           <a:p>
             <a:r>
+              <a:rPr dirty="0"/>
               <a:t>- Contrast mistake, brute force, and spray</a:t>
             </a:r>
           </a:p>
           <a:p>
             <a:r>
+              <a:rPr dirty="0"/>
               <a:t>- Explain why pattern shape affects response</a:t>
             </a:r>
           </a:p>
           <a:p>
             <a:r>
+              <a:rPr dirty="0"/>
               <a:t>- Keep the interpretation practical</a:t>
             </a:r>
           </a:p>
@@ -754,7 +572,7 @@
             <a:spLocks noGrp="1"/>
           </p:cNvSpPr>
           <p:nvPr>
-            <p:ph type="sldNum" idx="5" sz="quarter"/>
+            <p:ph type="sldNum" sz="quarter" idx="5"/>
           </p:nvPr>
         </p:nvSpPr>
         <p:spPr/>
@@ -768,7 +586,7 @@
 </file>
 
 <file path=ppt/notesSlides/notesSlide12.xml><?xml version="1.0" encoding="utf-8"?>
-<p:notes xmlns:a="http://schemas.openxmlformats.org/drawingml/2006/main" xmlns:p="http://schemas.openxmlformats.org/presentationml/2006/main" xmlns:r="http://schemas.openxmlformats.org/officeDocument/2006/relationships">
+<p:notes xmlns:a="http://schemas.openxmlformats.org/drawingml/2006/main" xmlns:r="http://schemas.openxmlformats.org/officeDocument/2006/relationships" xmlns:p="http://schemas.openxmlformats.org/presentationml/2006/main">
   <p:cSld>
     <p:spTree>
       <p:nvGrpSpPr>
@@ -788,7 +606,7 @@
         <p:nvSpPr>
           <p:cNvPr id="2" name="Slide Image Placeholder 1"/>
           <p:cNvSpPr>
-            <a:spLocks noGrp="1"/>
+            <a:spLocks noGrp="1" noRot="1" noChangeAspect="1"/>
           </p:cNvSpPr>
           <p:nvPr>
             <p:ph type="sldImg" idx="2"/>
@@ -803,7 +621,7 @@
             <a:spLocks noGrp="1"/>
           </p:cNvSpPr>
           <p:nvPr>
-            <p:ph type="body" idx="3" sz="quarter"/>
+            <p:ph type="body" sz="quarter" idx="3"/>
           </p:nvPr>
         </p:nvSpPr>
         <p:spPr/>
@@ -812,32 +630,40 @@
           <a:lstStyle/>
           <a:p>
             <a:r>
+              <a:rPr dirty="0"/>
               <a:t>Script:</a:t>
             </a:r>
           </a:p>
           <a:p>
             <a:r>
+              <a:rPr dirty="0"/>
               <a:t>Analytics without baseline can become panic, and analytics without baseline can also become complacency. A morning login spike may be perfectly normal for a campus service. A rare admin login from an unfamiliar source may be abnormal even if the raw event count is low. Baseline means asking what is normal for this system, this user, this device, and this time of day. Students do not have to build a full statistical baseline today, but they do need the habit of comparison. Suspicion only makes sense relative to expectation. That is why analysts ask whether the activity is usual, whether the source is common, whether the timing makes sense, and whether similar patterns have occurred before without harm. Baseline is one of the reasons security analytics requires both data and context.</a:t>
             </a:r>
           </a:p>
-          <a:p/>
-          <a:p>
-            <a:r>
+          <a:p>
+            <a:endParaRPr dirty="0"/>
+          </a:p>
+          <a:p>
+            <a:r>
+              <a:rPr dirty="0"/>
               <a:t>Mention:</a:t>
             </a:r>
           </a:p>
           <a:p>
             <a:r>
+              <a:rPr dirty="0"/>
               <a:t>- Define baseline in plain language</a:t>
             </a:r>
           </a:p>
           <a:p>
             <a:r>
+              <a:rPr dirty="0"/>
               <a:t>- Warn against both overreaction and underreaction</a:t>
             </a:r>
           </a:p>
           <a:p>
             <a:r>
+              <a:rPr dirty="0"/>
               <a:t>- Tie suspicion to expectation</a:t>
             </a:r>
           </a:p>
@@ -850,7 +676,7 @@
             <a:spLocks noGrp="1"/>
           </p:cNvSpPr>
           <p:nvPr>
-            <p:ph type="sldNum" idx="5" sz="quarter"/>
+            <p:ph type="sldNum" sz="quarter" idx="5"/>
           </p:nvPr>
         </p:nvSpPr>
         <p:spPr/>
@@ -864,7 +690,7 @@
 </file>
 
 <file path=ppt/notesSlides/notesSlide13.xml><?xml version="1.0" encoding="utf-8"?>
-<p:notes xmlns:a="http://schemas.openxmlformats.org/drawingml/2006/main" xmlns:p="http://schemas.openxmlformats.org/presentationml/2006/main" xmlns:r="http://schemas.openxmlformats.org/officeDocument/2006/relationships">
+<p:notes xmlns:a="http://schemas.openxmlformats.org/drawingml/2006/main" xmlns:r="http://schemas.openxmlformats.org/officeDocument/2006/relationships" xmlns:p="http://schemas.openxmlformats.org/presentationml/2006/main">
   <p:cSld>
     <p:spTree>
       <p:nvGrpSpPr>
@@ -884,7 +710,7 @@
         <p:nvSpPr>
           <p:cNvPr id="2" name="Slide Image Placeholder 1"/>
           <p:cNvSpPr>
-            <a:spLocks noGrp="1"/>
+            <a:spLocks noGrp="1" noRot="1" noChangeAspect="1"/>
           </p:cNvSpPr>
           <p:nvPr>
             <p:ph type="sldImg" idx="2"/>
@@ -899,7 +725,7 @@
             <a:spLocks noGrp="1"/>
           </p:cNvSpPr>
           <p:nvPr>
-            <p:ph type="body" idx="3" sz="quarter"/>
+            <p:ph type="body" sz="quarter" idx="3"/>
           </p:nvPr>
         </p:nvSpPr>
         <p:spPr/>
@@ -908,32 +734,40 @@
           <a:lstStyle/>
           <a:p>
             <a:r>
+              <a:rPr dirty="0"/>
               <a:t>Script:</a:t>
             </a:r>
           </a:p>
           <a:p>
             <a:r>
+              <a:rPr dirty="0"/>
               <a:t>Enrichment is where the analysis becomes more realistic. A suspicious login pattern means one thing on a low-risk student account and something else on a finance administrator account. Department, role title, privilege, and sensitive-account status can all change urgency. Students sometimes think enrichment is just a technical merge operation, but it is more than that. It is the step where business meaning enters the analysis. Without enrichment, analytics can remain technically interesting but operationally weak. With enrichment, the same pattern becomes much easier to prioritize. That is exactly why today’s lab uses a second CSV. I want students to experience the moment when an initially suspicious pattern becomes clearly more urgent because the account context shows higher value, higher privilege, or higher data sensitivity.</a:t>
             </a:r>
           </a:p>
-          <a:p/>
-          <a:p>
-            <a:r>
+          <a:p>
+            <a:endParaRPr dirty="0"/>
+          </a:p>
+          <a:p>
+            <a:r>
+              <a:rPr dirty="0"/>
               <a:t>Mention:</a:t>
             </a:r>
           </a:p>
           <a:p>
             <a:r>
+              <a:rPr dirty="0"/>
               <a:t>- Define enrichment as adding business meaning</a:t>
             </a:r>
           </a:p>
           <a:p>
             <a:r>
+              <a:rPr dirty="0"/>
               <a:t>- Explain why context changes urgency</a:t>
             </a:r>
           </a:p>
           <a:p>
             <a:r>
+              <a:rPr dirty="0"/>
               <a:t>- Connect directly to the second CSV</a:t>
             </a:r>
           </a:p>
@@ -946,7 +780,7 @@
             <a:spLocks noGrp="1"/>
           </p:cNvSpPr>
           <p:nvPr>
-            <p:ph type="sldNum" idx="5" sz="quarter"/>
+            <p:ph type="sldNum" sz="quarter" idx="5"/>
           </p:nvPr>
         </p:nvSpPr>
         <p:spPr/>
@@ -960,7 +794,7 @@
 </file>
 
 <file path=ppt/notesSlides/notesSlide14.xml><?xml version="1.0" encoding="utf-8"?>
-<p:notes xmlns:a="http://schemas.openxmlformats.org/drawingml/2006/main" xmlns:p="http://schemas.openxmlformats.org/presentationml/2006/main" xmlns:r="http://schemas.openxmlformats.org/officeDocument/2006/relationships">
+<p:notes xmlns:a="http://schemas.openxmlformats.org/drawingml/2006/main" xmlns:r="http://schemas.openxmlformats.org/officeDocument/2006/relationships" xmlns:p="http://schemas.openxmlformats.org/presentationml/2006/main">
   <p:cSld>
     <p:spTree>
       <p:nvGrpSpPr>
@@ -980,7 +814,7 @@
         <p:nvSpPr>
           <p:cNvPr id="2" name="Slide Image Placeholder 1"/>
           <p:cNvSpPr>
-            <a:spLocks noGrp="1"/>
+            <a:spLocks noGrp="1" noRot="1" noChangeAspect="1"/>
           </p:cNvSpPr>
           <p:nvPr>
             <p:ph type="sldImg" idx="2"/>
@@ -995,7 +829,7 @@
             <a:spLocks noGrp="1"/>
           </p:cNvSpPr>
           <p:nvPr>
-            <p:ph type="body" idx="3" sz="quarter"/>
+            <p:ph type="body" sz="quarter" idx="3"/>
           </p:nvPr>
         </p:nvSpPr>
         <p:spPr/>
@@ -1004,32 +838,40 @@
           <a:lstStyle/>
           <a:p>
             <a:r>
+              <a:rPr dirty="0"/>
               <a:t>Script:</a:t>
             </a:r>
           </a:p>
           <a:p>
             <a:r>
+              <a:rPr dirty="0"/>
               <a:t>This slide is deliberately practical. I want students to see that meaningful security analytics can begin in a spreadsheet or simple CSV viewer. First, sort by time so the activity is readable as a sequence. Second, filter to the event types you care about, such as failed logins. Third, count by source IP and count by user. Fourth, look for later successes or MFA-related events that make the pattern more urgent. Fifth, merge or compare against account context. Finally, choose a first action and justify it. None of those steps requires advanced code. That matters because students should not leave thinking they need a full enterprise platform before they can reason like analysts. The workflow itself is the real skill. Tools can change later.</a:t>
             </a:r>
           </a:p>
-          <a:p/>
-          <a:p>
-            <a:r>
+          <a:p>
+            <a:endParaRPr dirty="0"/>
+          </a:p>
+          <a:p>
+            <a:r>
+              <a:rPr dirty="0"/>
               <a:t>Mention:</a:t>
             </a:r>
           </a:p>
           <a:p>
             <a:r>
+              <a:rPr dirty="0"/>
               <a:t>- Walk through a usable beginner workflow</a:t>
             </a:r>
           </a:p>
           <a:p>
             <a:r>
+              <a:rPr dirty="0"/>
               <a:t>- Explain why simple tools are enough for learning</a:t>
             </a:r>
           </a:p>
           <a:p>
             <a:r>
+              <a:rPr dirty="0"/>
               <a:t>- Stress that workflow matters more than software</a:t>
             </a:r>
           </a:p>
@@ -1042,7 +884,7 @@
             <a:spLocks noGrp="1"/>
           </p:cNvSpPr>
           <p:nvPr>
-            <p:ph type="sldNum" idx="5" sz="quarter"/>
+            <p:ph type="sldNum" sz="quarter" idx="5"/>
           </p:nvPr>
         </p:nvSpPr>
         <p:spPr/>
@@ -1056,7 +898,7 @@
 </file>
 
 <file path=ppt/notesSlides/notesSlide15.xml><?xml version="1.0" encoding="utf-8"?>
-<p:notes xmlns:a="http://schemas.openxmlformats.org/drawingml/2006/main" xmlns:p="http://schemas.openxmlformats.org/presentationml/2006/main" xmlns:r="http://schemas.openxmlformats.org/officeDocument/2006/relationships">
+<p:notes xmlns:a="http://schemas.openxmlformats.org/drawingml/2006/main" xmlns:r="http://schemas.openxmlformats.org/officeDocument/2006/relationships" xmlns:p="http://schemas.openxmlformats.org/presentationml/2006/main">
   <p:cSld>
     <p:spTree>
       <p:nvGrpSpPr>
@@ -1076,7 +918,7 @@
         <p:nvSpPr>
           <p:cNvPr id="2" name="Slide Image Placeholder 1"/>
           <p:cNvSpPr>
-            <a:spLocks noGrp="1"/>
+            <a:spLocks noGrp="1" noRot="1" noChangeAspect="1"/>
           </p:cNvSpPr>
           <p:nvPr>
             <p:ph type="sldImg" idx="2"/>
@@ -1091,7 +933,7 @@
             <a:spLocks noGrp="1"/>
           </p:cNvSpPr>
           <p:nvPr>
-            <p:ph type="body" idx="3" sz="quarter"/>
+            <p:ph type="body" sz="quarter" idx="3"/>
           </p:nvPr>
         </p:nvSpPr>
         <p:spPr/>
@@ -1108,7 +950,9 @@
               <a:t>Now we move into the worked example built into the Day 1 dataset. One external IP shows up repeatedly in failed login events, and it targets many different users. That pattern is what should catch the eye first. It is not behaving like one person forgetting a password on one account. It is distributing attempts across several accounts. That shape matters because it suggests a password spray rather than an isolated mistake or a narrow brute-force attempt. At this stage, the analyst should not yet claim full account compromise. That would be too strong. But the analyst should absolutely classify this as suspicious and worthy of further attention. This is the first place where students can see how counting, grouping, and pattern recognition begin to produce a defensible security conclusion.</a:t>
             </a:r>
           </a:p>
-          <a:p/>
+          <a:p>
+            <a:endParaRPr/>
+          </a:p>
           <a:p>
             <a:r>
               <a:t>Mention:</a:t>
@@ -1138,7 +982,7 @@
             <a:spLocks noGrp="1"/>
           </p:cNvSpPr>
           <p:nvPr>
-            <p:ph type="sldNum" idx="5" sz="quarter"/>
+            <p:ph type="sldNum" sz="quarter" idx="5"/>
           </p:nvPr>
         </p:nvSpPr>
         <p:spPr/>
@@ -1152,7 +996,7 @@
 </file>
 
 <file path=ppt/notesSlides/notesSlide16.xml><?xml version="1.0" encoding="utf-8"?>
-<p:notes xmlns:a="http://schemas.openxmlformats.org/drawingml/2006/main" xmlns:p="http://schemas.openxmlformats.org/presentationml/2006/main" xmlns:r="http://schemas.openxmlformats.org/officeDocument/2006/relationships">
+<p:notes xmlns:a="http://schemas.openxmlformats.org/drawingml/2006/main" xmlns:r="http://schemas.openxmlformats.org/officeDocument/2006/relationships" xmlns:p="http://schemas.openxmlformats.org/presentationml/2006/main">
   <p:cSld>
     <p:spTree>
       <p:nvGrpSpPr>
@@ -1172,7 +1016,7 @@
         <p:nvSpPr>
           <p:cNvPr id="2" name="Slide Image Placeholder 1"/>
           <p:cNvSpPr>
-            <a:spLocks noGrp="1"/>
+            <a:spLocks noGrp="1" noRot="1" noChangeAspect="1"/>
           </p:cNvSpPr>
           <p:nvPr>
             <p:ph type="sldImg" idx="2"/>
@@ -1187,7 +1031,7 @@
             <a:spLocks noGrp="1"/>
           </p:cNvSpPr>
           <p:nvPr>
-            <p:ph type="body" idx="3" sz="quarter"/>
+            <p:ph type="body" sz="quarter" idx="3"/>
           </p:nvPr>
         </p:nvSpPr>
         <p:spPr/>
@@ -1204,7 +1048,9 @@
               <a:t>The example becomes more important when a successful login appears after repeated failures. This is the kind of sequence that shifts an analyst from concern to urgency. A success after many failures can suggest the attacker eventually guessed, obtained, or reused valid credentials. In the Day 1 dataset, that success is not on a random low-value account. The account is both privileged and sensitive. That enrichment step is what changes the severity of the story. Students need to see this clearly: a suspicious pattern plus a risky sequence plus a high-value account is much stronger than any one of those pieces on its own. This is how analytics works in real settings. You rarely get one decisive row. You get several pieces that become meaningful when interpreted together.</a:t>
             </a:r>
           </a:p>
-          <a:p/>
+          <a:p>
+            <a:endParaRPr/>
+          </a:p>
           <a:p>
             <a:r>
               <a:t>Mention:</a:t>
@@ -1234,7 +1080,7 @@
             <a:spLocks noGrp="1"/>
           </p:cNvSpPr>
           <p:nvPr>
-            <p:ph type="sldNum" idx="5" sz="quarter"/>
+            <p:ph type="sldNum" sz="quarter" idx="5"/>
           </p:nvPr>
         </p:nvSpPr>
         <p:spPr/>
@@ -1248,7 +1094,7 @@
 </file>
 
 <file path=ppt/notesSlides/notesSlide17.xml><?xml version="1.0" encoding="utf-8"?>
-<p:notes xmlns:a="http://schemas.openxmlformats.org/drawingml/2006/main" xmlns:p="http://schemas.openxmlformats.org/presentationml/2006/main" xmlns:r="http://schemas.openxmlformats.org/officeDocument/2006/relationships">
+<p:notes xmlns:a="http://schemas.openxmlformats.org/drawingml/2006/main" xmlns:r="http://schemas.openxmlformats.org/officeDocument/2006/relationships" xmlns:p="http://schemas.openxmlformats.org/presentationml/2006/main">
   <p:cSld>
     <p:spTree>
       <p:nvGrpSpPr>
@@ -1268,7 +1114,7 @@
         <p:nvSpPr>
           <p:cNvPr id="2" name="Slide Image Placeholder 1"/>
           <p:cNvSpPr>
-            <a:spLocks noGrp="1"/>
+            <a:spLocks noGrp="1" noRot="1" noChangeAspect="1"/>
           </p:cNvSpPr>
           <p:nvPr>
             <p:ph type="sldImg" idx="2"/>
@@ -1283,7 +1129,7 @@
             <a:spLocks noGrp="1"/>
           </p:cNvSpPr>
           <p:nvPr>
-            <p:ph type="body" idx="3" sz="quarter"/>
+            <p:ph type="body" sz="quarter" idx="3"/>
           </p:nvPr>
         </p:nvSpPr>
         <p:spPr/>
@@ -1300,7 +1146,9 @@
               <a:t>Notice that even at this point the analyst is not finished. The next question is what to do first. First action logic is about reducing immediate risk without pretending the entire problem is already understood. Maybe you temporarily block the source IP. Maybe you force a password reset on the affected account. Maybe you require MFA re-verification or open a deeper investigation. The best first step is usually the one that lowers immediate risk quickly while leaving room for follow-up analysis. I also want students to understand tradeoffs. Blocking an IP may be fast but incomplete. Forcing a reset may protect the account but inconvenience a real user. Good analysts choose proportionate action and can explain both the benefit and the downside. That habit matters just as much as pattern recognition.</a:t>
             </a:r>
           </a:p>
-          <a:p/>
+          <a:p>
+            <a:endParaRPr/>
+          </a:p>
           <a:p>
             <a:r>
               <a:t>Mention:</a:t>
@@ -1330,7 +1178,7 @@
             <a:spLocks noGrp="1"/>
           </p:cNvSpPr>
           <p:nvPr>
-            <p:ph type="sldNum" idx="5" sz="quarter"/>
+            <p:ph type="sldNum" sz="quarter" idx="5"/>
           </p:nvPr>
         </p:nvSpPr>
         <p:spPr/>
@@ -1344,7 +1192,7 @@
 </file>
 
 <file path=ppt/notesSlides/notesSlide18.xml><?xml version="1.0" encoding="utf-8"?>
-<p:notes xmlns:a="http://schemas.openxmlformats.org/drawingml/2006/main" xmlns:p="http://schemas.openxmlformats.org/presentationml/2006/main" xmlns:r="http://schemas.openxmlformats.org/officeDocument/2006/relationships">
+<p:notes xmlns:a="http://schemas.openxmlformats.org/drawingml/2006/main" xmlns:r="http://schemas.openxmlformats.org/officeDocument/2006/relationships" xmlns:p="http://schemas.openxmlformats.org/presentationml/2006/main">
   <p:cSld>
     <p:spTree>
       <p:nvGrpSpPr>
@@ -1364,7 +1212,7 @@
         <p:nvSpPr>
           <p:cNvPr id="2" name="Slide Image Placeholder 1"/>
           <p:cNvSpPr>
-            <a:spLocks noGrp="1"/>
+            <a:spLocks noGrp="1" noRot="1" noChangeAspect="1"/>
           </p:cNvSpPr>
           <p:nvPr>
             <p:ph type="sldImg" idx="2"/>
@@ -1379,7 +1227,7 @@
             <a:spLocks noGrp="1"/>
           </p:cNvSpPr>
           <p:nvPr>
-            <p:ph type="body" idx="3" sz="quarter"/>
+            <p:ph type="body" sz="quarter" idx="3"/>
           </p:nvPr>
         </p:nvSpPr>
         <p:spPr/>
@@ -1396,7 +1244,9 @@
               <a:t>This slide exists to prevent overconfidence. Analytics helps, but analysts still need to reason carefully. People mistype passwords. New devices appear. Travel changes location. Maintenance windows create odd behavior. If students treat every unusual row as confirmed malicious activity, they will generate unnecessary disruption. But I do not want false-positive awareness to turn into hesitation either. The right habit is proportional judgment. One odd row may justify monitoring. A stronger pattern may justify intervention. The combination of repetition, sequence, and context is usually what raises confidence. I want students to be able to say not only why something is suspicious, but also why they are not overstating the case. That is part of professional credibility in security work.</a:t>
             </a:r>
           </a:p>
-          <a:p/>
+          <a:p>
+            <a:endParaRPr/>
+          </a:p>
           <a:p>
             <a:r>
               <a:t>Mention:</a:t>
@@ -1426,7 +1276,7 @@
             <a:spLocks noGrp="1"/>
           </p:cNvSpPr>
           <p:nvPr>
-            <p:ph type="sldNum" idx="5" sz="quarter"/>
+            <p:ph type="sldNum" sz="quarter" idx="5"/>
           </p:nvPr>
         </p:nvSpPr>
         <p:spPr/>
@@ -1440,7 +1290,7 @@
 </file>
 
 <file path=ppt/notesSlides/notesSlide19.xml><?xml version="1.0" encoding="utf-8"?>
-<p:notes xmlns:a="http://schemas.openxmlformats.org/drawingml/2006/main" xmlns:p="http://schemas.openxmlformats.org/presentationml/2006/main" xmlns:r="http://schemas.openxmlformats.org/officeDocument/2006/relationships">
+<p:notes xmlns:a="http://schemas.openxmlformats.org/drawingml/2006/main" xmlns:r="http://schemas.openxmlformats.org/officeDocument/2006/relationships" xmlns:p="http://schemas.openxmlformats.org/presentationml/2006/main">
   <p:cSld>
     <p:spTree>
       <p:nvGrpSpPr>
@@ -1460,7 +1310,7 @@
         <p:nvSpPr>
           <p:cNvPr id="2" name="Slide Image Placeholder 1"/>
           <p:cNvSpPr>
-            <a:spLocks noGrp="1"/>
+            <a:spLocks noGrp="1" noRot="1" noChangeAspect="1"/>
           </p:cNvSpPr>
           <p:nvPr>
             <p:ph type="sldImg" idx="2"/>
@@ -1475,7 +1325,7 @@
             <a:spLocks noGrp="1"/>
           </p:cNvSpPr>
           <p:nvPr>
-            <p:ph type="body" idx="3" sz="quarter"/>
+            <p:ph type="body" sz="quarter" idx="3"/>
           </p:nvPr>
         </p:nvSpPr>
         <p:spPr/>
@@ -1492,7 +1342,9 @@
               <a:t>Because this course is also about privacy and ethics, I want to keep one limit in view the whole time. Good security visibility is not the same as unlimited surveillance. Logs matter because they support detection, investigation, and accountability. Without records, many attacks would be difficult to reconstruct. But collection and retention still require justification. Organizations should know why they are keeping data, for how long, and who can access it. Security purpose should guide collection, not curiosity or convenience alone. Students need to learn that analytics can be both necessary and bounded. That combination is what separates responsible security practice from a more careless, surveillance-heavy approach to monitoring people and systems.</a:t>
             </a:r>
           </a:p>
-          <a:p/>
+          <a:p>
+            <a:endParaRPr/>
+          </a:p>
           <a:p>
             <a:r>
               <a:t>Mention:</a:t>
@@ -1522,7 +1374,7 @@
             <a:spLocks noGrp="1"/>
           </p:cNvSpPr>
           <p:nvPr>
-            <p:ph type="sldNum" idx="5" sz="quarter"/>
+            <p:ph type="sldNum" sz="quarter" idx="5"/>
           </p:nvPr>
         </p:nvSpPr>
         <p:spPr/>
@@ -1536,7 +1388,7 @@
 </file>
 
 <file path=ppt/notesSlides/notesSlide2.xml><?xml version="1.0" encoding="utf-8"?>
-<p:notes xmlns:a="http://schemas.openxmlformats.org/drawingml/2006/main" xmlns:p="http://schemas.openxmlformats.org/presentationml/2006/main" xmlns:r="http://schemas.openxmlformats.org/officeDocument/2006/relationships">
+<p:notes xmlns:a="http://schemas.openxmlformats.org/drawingml/2006/main" xmlns:r="http://schemas.openxmlformats.org/officeDocument/2006/relationships" xmlns:p="http://schemas.openxmlformats.org/presentationml/2006/main">
   <p:cSld>
     <p:spTree>
       <p:nvGrpSpPr>
@@ -1556,7 +1408,7 @@
         <p:nvSpPr>
           <p:cNvPr id="2" name="Slide Image Placeholder 1"/>
           <p:cNvSpPr>
-            <a:spLocks noGrp="1"/>
+            <a:spLocks noGrp="1" noRot="1" noChangeAspect="1"/>
           </p:cNvSpPr>
           <p:nvPr>
             <p:ph type="sldImg" idx="2"/>
@@ -1571,7 +1423,7 @@
             <a:spLocks noGrp="1"/>
           </p:cNvSpPr>
           <p:nvPr>
-            <p:ph type="body" idx="3" sz="quarter"/>
+            <p:ph type="body" sz="quarter" idx="3"/>
           </p:nvPr>
         </p:nvSpPr>
         <p:spPr/>
@@ -1580,32 +1432,40 @@
           <a:lstStyle/>
           <a:p>
             <a:r>
+              <a:rPr dirty="0"/>
               <a:t>Script:</a:t>
             </a:r>
           </a:p>
           <a:p>
             <a:r>
+              <a:rPr dirty="0"/>
               <a:t>Data analytics belongs in this course because modern security work almost always begins with partial information. Analysts rarely see an attacker standing clearly in front of them. Instead, they see fragments: login attempts, an IP address, a timestamp, a device type, maybe a password reset, maybe an MFA denial. The technical challenge is to decide whether those fragments add up to risk. The ethical challenge is to decide how much monitoring is justified, how long data should be kept, and who should be allowed to view it. So analytics is not only a technical capability. It is also a governance question. That is why it fits naturally in a course called Security, Privacy, and Ethics. Students need both sides: the ability to interpret signals, and the discipline to use that visibility responsibly.</a:t>
             </a:r>
           </a:p>
-          <a:p/>
-          <a:p>
-            <a:r>
+          <a:p>
+            <a:endParaRPr dirty="0"/>
+          </a:p>
+          <a:p>
+            <a:r>
+              <a:rPr dirty="0"/>
               <a:t>Mention:</a:t>
             </a:r>
           </a:p>
           <a:p>
             <a:r>
+              <a:rPr dirty="0"/>
               <a:t>- Connect analytics to security decisions</a:t>
             </a:r>
           </a:p>
           <a:p>
             <a:r>
+              <a:rPr dirty="0"/>
               <a:t>- Connect analytics to privacy and governance</a:t>
             </a:r>
           </a:p>
           <a:p>
             <a:r>
+              <a:rPr dirty="0"/>
               <a:t>- Keep both capability and restraint in view</a:t>
             </a:r>
           </a:p>
@@ -1618,7 +1478,7 @@
             <a:spLocks noGrp="1"/>
           </p:cNvSpPr>
           <p:nvPr>
-            <p:ph type="sldNum" idx="5" sz="quarter"/>
+            <p:ph type="sldNum" sz="quarter" idx="5"/>
           </p:nvPr>
         </p:nvSpPr>
         <p:spPr/>
@@ -1632,7 +1492,7 @@
 </file>
 
 <file path=ppt/notesSlides/notesSlide20.xml><?xml version="1.0" encoding="utf-8"?>
-<p:notes xmlns:a="http://schemas.openxmlformats.org/drawingml/2006/main" xmlns:p="http://schemas.openxmlformats.org/presentationml/2006/main" xmlns:r="http://schemas.openxmlformats.org/officeDocument/2006/relationships">
+<p:notes xmlns:a="http://schemas.openxmlformats.org/drawingml/2006/main" xmlns:r="http://schemas.openxmlformats.org/officeDocument/2006/relationships" xmlns:p="http://schemas.openxmlformats.org/presentationml/2006/main">
   <p:cSld>
     <p:spTree>
       <p:nvGrpSpPr>
@@ -1652,7 +1512,7 @@
         <p:nvSpPr>
           <p:cNvPr id="2" name="Slide Image Placeholder 1"/>
           <p:cNvSpPr>
-            <a:spLocks noGrp="1"/>
+            <a:spLocks noGrp="1" noRot="1" noChangeAspect="1"/>
           </p:cNvSpPr>
           <p:nvPr>
             <p:ph type="sldImg" idx="2"/>
@@ -1667,7 +1527,7 @@
             <a:spLocks noGrp="1"/>
           </p:cNvSpPr>
           <p:nvPr>
-            <p:ph type="body" idx="3" sz="quarter"/>
+            <p:ph type="body" sz="quarter" idx="3"/>
           </p:nvPr>
         </p:nvSpPr>
         <p:spPr/>
@@ -1684,7 +1544,9 @@
               <a:t>Students often ask what actual professional skill they are building when they do a CSV exercise like this. The answer is that they are practicing the work habits of entry-level security roles. SOC analysts, security operations interns, incident triage analysts, and junior detection analysts spend a lot of time sorting data, counting patterns, comparing context, and communicating next steps. That work may sound simple, but it is foundational. Security teams depend on people who can read evidence carefully and explain what should happen next without overclaiming. That is why this course keeps including career-connected writing. I want students to recognize that the lab and the memo are not separate activities. Together they model a realistic analyst workflow: analyze, decide, and communicate.</a:t>
             </a:r>
           </a:p>
-          <a:p/>
+          <a:p>
+            <a:endParaRPr/>
+          </a:p>
           <a:p>
             <a:r>
               <a:t>Mention:</a:t>
@@ -1714,7 +1576,7 @@
             <a:spLocks noGrp="1"/>
           </p:cNvSpPr>
           <p:nvPr>
-            <p:ph type="sldNum" idx="5" sz="quarter"/>
+            <p:ph type="sldNum" sz="quarter" idx="5"/>
           </p:nvPr>
         </p:nvSpPr>
         <p:spPr/>
@@ -1728,7 +1590,7 @@
 </file>
 
 <file path=ppt/notesSlides/notesSlide21.xml><?xml version="1.0" encoding="utf-8"?>
-<p:notes xmlns:a="http://schemas.openxmlformats.org/drawingml/2006/main" xmlns:p="http://schemas.openxmlformats.org/presentationml/2006/main" xmlns:r="http://schemas.openxmlformats.org/officeDocument/2006/relationships">
+<p:notes xmlns:a="http://schemas.openxmlformats.org/drawingml/2006/main" xmlns:r="http://schemas.openxmlformats.org/officeDocument/2006/relationships" xmlns:p="http://schemas.openxmlformats.org/presentationml/2006/main">
   <p:cSld>
     <p:spTree>
       <p:nvGrpSpPr>
@@ -1748,7 +1610,7 @@
         <p:nvSpPr>
           <p:cNvPr id="2" name="Slide Image Placeholder 1"/>
           <p:cNvSpPr>
-            <a:spLocks noGrp="1"/>
+            <a:spLocks noGrp="1" noRot="1" noChangeAspect="1"/>
           </p:cNvSpPr>
           <p:nvPr>
             <p:ph type="sldImg" idx="2"/>
@@ -1763,7 +1625,7 @@
             <a:spLocks noGrp="1"/>
           </p:cNvSpPr>
           <p:nvPr>
-            <p:ph type="body" idx="3" sz="quarter"/>
+            <p:ph type="body" sz="quarter" idx="3"/>
           </p:nvPr>
         </p:nvSpPr>
         <p:spPr/>
@@ -1780,7 +1642,9 @@
               <a:t>The lab is where students apply the lecture structure to actual data. They will use two CSV files, one with authentication events and one with account context. Their job is to count failed logins, identify the suspicious source, find the risky success, and recommend one first action. I want the lab to feel approachable in tooling and serious in reasoning. They can use any spreadsheet or CSV tool they prefer. The point is not programming. The point is disciplined interpretation. By the end of the lab, they should be able to point to a specific pattern, explain why it matters, and justify what they would do first. That is already real analytics work.</a:t>
             </a:r>
           </a:p>
-          <a:p/>
+          <a:p>
+            <a:endParaRPr/>
+          </a:p>
           <a:p>
             <a:r>
               <a:t>Mention:</a:t>
@@ -1810,7 +1674,7 @@
             <a:spLocks noGrp="1"/>
           </p:cNvSpPr>
           <p:nvPr>
-            <p:ph type="sldNum" idx="5" sz="quarter"/>
+            <p:ph type="sldNum" sz="quarter" idx="5"/>
           </p:nvPr>
         </p:nvSpPr>
         <p:spPr/>
@@ -1824,7 +1688,7 @@
 </file>
 
 <file path=ppt/notesSlides/notesSlide22.xml><?xml version="1.0" encoding="utf-8"?>
-<p:notes xmlns:a="http://schemas.openxmlformats.org/drawingml/2006/main" xmlns:p="http://schemas.openxmlformats.org/presentationml/2006/main" xmlns:r="http://schemas.openxmlformats.org/officeDocument/2006/relationships">
+<p:notes xmlns:a="http://schemas.openxmlformats.org/drawingml/2006/main" xmlns:r="http://schemas.openxmlformats.org/officeDocument/2006/relationships" xmlns:p="http://schemas.openxmlformats.org/presentationml/2006/main">
   <p:cSld>
     <p:spTree>
       <p:nvGrpSpPr>
@@ -1844,7 +1708,7 @@
         <p:nvSpPr>
           <p:cNvPr id="2" name="Slide Image Placeholder 1"/>
           <p:cNvSpPr>
-            <a:spLocks noGrp="1"/>
+            <a:spLocks noGrp="1" noRot="1" noChangeAspect="1"/>
           </p:cNvSpPr>
           <p:nvPr>
             <p:ph type="sldImg" idx="2"/>
@@ -1859,7 +1723,7 @@
             <a:spLocks noGrp="1"/>
           </p:cNvSpPr>
           <p:nvPr>
-            <p:ph type="body" idx="3" sz="quarter"/>
+            <p:ph type="body" sz="quarter" idx="3"/>
           </p:nvPr>
         </p:nvSpPr>
         <p:spPr/>
@@ -1876,7 +1740,9 @@
               <a:t>The writing response is deliberately short and professional. I do not want a generic essay. I want a shift note. That means one suspicious pattern, one exact piece of evidence, one context-based reason for urgency, one recommended first action, and one privacy-aware sentence. The best notes are brief but useful. They give the next person enough information to act. This kind of writing is a real skill in security operations because a weak note creates confusion and delay, while a strong note helps a team respond efficiently. Students should hear clearly that the writing assignment is not extra decoration around the lab. It is part of the analyst workflow itself.</a:t>
             </a:r>
           </a:p>
-          <a:p/>
+          <a:p>
+            <a:endParaRPr/>
+          </a:p>
           <a:p>
             <a:r>
               <a:t>Mention:</a:t>
@@ -1906,7 +1772,7 @@
             <a:spLocks noGrp="1"/>
           </p:cNvSpPr>
           <p:nvPr>
-            <p:ph type="sldNum" idx="5" sz="quarter"/>
+            <p:ph type="sldNum" sz="quarter" idx="5"/>
           </p:nvPr>
         </p:nvSpPr>
         <p:spPr/>
@@ -1920,7 +1786,7 @@
 </file>
 
 <file path=ppt/notesSlides/notesSlide23.xml><?xml version="1.0" encoding="utf-8"?>
-<p:notes xmlns:a="http://schemas.openxmlformats.org/drawingml/2006/main" xmlns:p="http://schemas.openxmlformats.org/presentationml/2006/main" xmlns:r="http://schemas.openxmlformats.org/officeDocument/2006/relationships">
+<p:notes xmlns:a="http://schemas.openxmlformats.org/drawingml/2006/main" xmlns:r="http://schemas.openxmlformats.org/officeDocument/2006/relationships" xmlns:p="http://schemas.openxmlformats.org/presentationml/2006/main">
   <p:cSld>
     <p:spTree>
       <p:nvGrpSpPr>
@@ -1940,7 +1806,7 @@
         <p:nvSpPr>
           <p:cNvPr id="2" name="Slide Image Placeholder 1"/>
           <p:cNvSpPr>
-            <a:spLocks noGrp="1"/>
+            <a:spLocks noGrp="1" noRot="1" noChangeAspect="1"/>
           </p:cNvSpPr>
           <p:nvPr>
             <p:ph type="sldImg" idx="2"/>
@@ -1955,7 +1821,7 @@
             <a:spLocks noGrp="1"/>
           </p:cNvSpPr>
           <p:nvPr>
-            <p:ph type="body" idx="3" sz="quarter"/>
+            <p:ph type="body" sz="quarter" idx="3"/>
           </p:nvPr>
         </p:nvSpPr>
         <p:spPr/>
@@ -1972,7 +1838,9 @@
               <a:t>The point of Day 1 is not just to memorize definitions like event, alert, or baseline. The point is to build analyst habits. Students should leave able to separate one row from one pattern, one pattern from one risk, and one risk from one first action. They should also understand that analytics does not stand outside ethics. Monitoring requires limits, and action requires justification. That combination of practical reasoning and ethical discipline is exactly what I want from this course. Day 2 will build on this by moving from suspicious-pattern recognition to triage and escalation, but Day 1 is where the foundation is set. If students can read the CSVs, identify the risky sequence, and write a clear shift note, then the hour has done its job.</a:t>
             </a:r>
           </a:p>
-          <a:p/>
+          <a:p>
+            <a:endParaRPr/>
+          </a:p>
           <a:p>
             <a:r>
               <a:t>Mention:</a:t>
@@ -2002,7 +1870,7 @@
             <a:spLocks noGrp="1"/>
           </p:cNvSpPr>
           <p:nvPr>
-            <p:ph type="sldNum" idx="5" sz="quarter"/>
+            <p:ph type="sldNum" sz="quarter" idx="5"/>
           </p:nvPr>
         </p:nvSpPr>
         <p:spPr/>
@@ -2016,7 +1884,7 @@
 </file>
 
 <file path=ppt/notesSlides/notesSlide3.xml><?xml version="1.0" encoding="utf-8"?>
-<p:notes xmlns:a="http://schemas.openxmlformats.org/drawingml/2006/main" xmlns:p="http://schemas.openxmlformats.org/presentationml/2006/main" xmlns:r="http://schemas.openxmlformats.org/officeDocument/2006/relationships">
+<p:notes xmlns:a="http://schemas.openxmlformats.org/drawingml/2006/main" xmlns:r="http://schemas.openxmlformats.org/officeDocument/2006/relationships" xmlns:p="http://schemas.openxmlformats.org/presentationml/2006/main">
   <p:cSld>
     <p:spTree>
       <p:nvGrpSpPr>
@@ -2036,7 +1904,7 @@
         <p:nvSpPr>
           <p:cNvPr id="2" name="Slide Image Placeholder 1"/>
           <p:cNvSpPr>
-            <a:spLocks noGrp="1"/>
+            <a:spLocks noGrp="1" noRot="1" noChangeAspect="1"/>
           </p:cNvSpPr>
           <p:nvPr>
             <p:ph type="sldImg" idx="2"/>
@@ -2051,7 +1919,7 @@
             <a:spLocks noGrp="1"/>
           </p:cNvSpPr>
           <p:nvPr>
-            <p:ph type="body" idx="3" sz="quarter"/>
+            <p:ph type="body" sz="quarter" idx="3"/>
           </p:nvPr>
         </p:nvSpPr>
         <p:spPr/>
@@ -2060,32 +1928,40 @@
           <a:lstStyle/>
           <a:p>
             <a:r>
+              <a:rPr dirty="0"/>
               <a:t>Script:</a:t>
             </a:r>
           </a:p>
           <a:p>
             <a:r>
+              <a:rPr dirty="0"/>
               <a:t>When I say security analytics, I mean the process of extracting useful security meaning from operational data. That can sound fancy, but the actual work is often straightforward. You look at data, you identify what repeats, you compare normal and unusual behavior, and you connect events to real users, systems, and consequences. I want to emphasize what security analytics is not. It is not only a machine learning discipline. It is not only a set of dashboards built by someone else. It is not only threat hunting done by senior experts. In many real jobs, especially early-career jobs, security analytics is the day-to-day discipline of careful reading, counting, grouping, and reasoning. If students understand that, they will have a more accurate picture of what the field actually looks like.</a:t>
             </a:r>
           </a:p>
-          <a:p/>
-          <a:p>
-            <a:r>
+          <a:p>
+            <a:endParaRPr dirty="0"/>
+          </a:p>
+          <a:p>
+            <a:r>
+              <a:rPr dirty="0"/>
               <a:t>Mention:</a:t>
             </a:r>
           </a:p>
           <a:p>
             <a:r>
+              <a:rPr dirty="0"/>
               <a:t>- Keep analytics broad and grounded</a:t>
             </a:r>
           </a:p>
           <a:p>
             <a:r>
+              <a:rPr dirty="0"/>
               <a:t>- Reject the idea that analytics means AI only</a:t>
             </a:r>
           </a:p>
           <a:p>
             <a:r>
+              <a:rPr dirty="0"/>
               <a:t>- Tie the topic to entry-level practice</a:t>
             </a:r>
           </a:p>
@@ -2098,7 +1974,7 @@
             <a:spLocks noGrp="1"/>
           </p:cNvSpPr>
           <p:nvPr>
-            <p:ph type="sldNum" idx="5" sz="quarter"/>
+            <p:ph type="sldNum" sz="quarter" idx="5"/>
           </p:nvPr>
         </p:nvSpPr>
         <p:spPr/>
@@ -2112,7 +1988,7 @@
 </file>
 
 <file path=ppt/notesSlides/notesSlide4.xml><?xml version="1.0" encoding="utf-8"?>
-<p:notes xmlns:a="http://schemas.openxmlformats.org/drawingml/2006/main" xmlns:p="http://schemas.openxmlformats.org/presentationml/2006/main" xmlns:r="http://schemas.openxmlformats.org/officeDocument/2006/relationships">
+<p:notes xmlns:a="http://schemas.openxmlformats.org/drawingml/2006/main" xmlns:r="http://schemas.openxmlformats.org/officeDocument/2006/relationships" xmlns:p="http://schemas.openxmlformats.org/presentationml/2006/main">
   <p:cSld>
     <p:spTree>
       <p:nvGrpSpPr>
@@ -2132,7 +2008,7 @@
         <p:nvSpPr>
           <p:cNvPr id="2" name="Slide Image Placeholder 1"/>
           <p:cNvSpPr>
-            <a:spLocks noGrp="1"/>
+            <a:spLocks noGrp="1" noRot="1" noChangeAspect="1"/>
           </p:cNvSpPr>
           <p:nvPr>
             <p:ph type="sldImg" idx="2"/>
@@ -2147,7 +2023,7 @@
             <a:spLocks noGrp="1"/>
           </p:cNvSpPr>
           <p:nvPr>
-            <p:ph type="body" idx="3" sz="quarter"/>
+            <p:ph type="body" sz="quarter" idx="3"/>
           </p:nvPr>
         </p:nvSpPr>
         <p:spPr/>
@@ -2156,32 +2032,40 @@
           <a:lstStyle/>
           <a:p>
             <a:r>
+              <a:rPr dirty="0"/>
               <a:t>Script:</a:t>
             </a:r>
           </a:p>
           <a:p>
             <a:r>
+              <a:rPr dirty="0"/>
               <a:t>This workflow slide is here because students often jump from raw data straight to conclusion. Good analysts do not do that. First, they observe. They open the data and learn what fields exist. Second, they filter, which means they narrow attention to the event types or sources that deserve focus. Third, they compare, usually through counts, sequence, or repetition. Fourth, they enrich by bringing in outside context such as privilege, department, or system sensitivity. Only then do they act. That final step matters because analytics is not complete when you merely notice something odd. Analytics becomes useful when you can justify a first action and explain why it makes sense. I want students to leave with this workflow in their heads because it gives them a repeatable structure they can use even in a very simple spreadsheet exercise.</a:t>
             </a:r>
           </a:p>
-          <a:p/>
-          <a:p>
-            <a:r>
+          <a:p>
+            <a:endParaRPr dirty="0"/>
+          </a:p>
+          <a:p>
+            <a:r>
+              <a:rPr dirty="0"/>
               <a:t>Mention:</a:t>
             </a:r>
           </a:p>
           <a:p>
             <a:r>
+              <a:rPr dirty="0"/>
               <a:t>- Walk through the workflow slowly</a:t>
             </a:r>
           </a:p>
           <a:p>
             <a:r>
+              <a:rPr dirty="0"/>
               <a:t>- Stress enrichment before action</a:t>
             </a:r>
           </a:p>
           <a:p>
             <a:r>
+              <a:rPr dirty="0"/>
               <a:t>- Present the workflow as repeatable</a:t>
             </a:r>
           </a:p>
@@ -2194,7 +2078,7 @@
             <a:spLocks noGrp="1"/>
           </p:cNvSpPr>
           <p:nvPr>
-            <p:ph type="sldNum" idx="5" sz="quarter"/>
+            <p:ph type="sldNum" sz="quarter" idx="5"/>
           </p:nvPr>
         </p:nvSpPr>
         <p:spPr/>
@@ -2208,7 +2092,7 @@
 </file>
 
 <file path=ppt/notesSlides/notesSlide5.xml><?xml version="1.0" encoding="utf-8"?>
-<p:notes xmlns:a="http://schemas.openxmlformats.org/drawingml/2006/main" xmlns:p="http://schemas.openxmlformats.org/presentationml/2006/main" xmlns:r="http://schemas.openxmlformats.org/officeDocument/2006/relationships">
+<p:notes xmlns:a="http://schemas.openxmlformats.org/drawingml/2006/main" xmlns:r="http://schemas.openxmlformats.org/officeDocument/2006/relationships" xmlns:p="http://schemas.openxmlformats.org/presentationml/2006/main">
   <p:cSld>
     <p:spTree>
       <p:nvGrpSpPr>
@@ -2228,7 +2112,7 @@
         <p:nvSpPr>
           <p:cNvPr id="2" name="Slide Image Placeholder 1"/>
           <p:cNvSpPr>
-            <a:spLocks noGrp="1"/>
+            <a:spLocks noGrp="1" noRot="1" noChangeAspect="1"/>
           </p:cNvSpPr>
           <p:nvPr>
             <p:ph type="sldImg" idx="2"/>
@@ -2243,7 +2127,7 @@
             <a:spLocks noGrp="1"/>
           </p:cNvSpPr>
           <p:nvPr>
-            <p:ph type="body" idx="3" sz="quarter"/>
+            <p:ph type="body" sz="quarter" idx="3"/>
           </p:nvPr>
         </p:nvSpPr>
         <p:spPr/>
@@ -2252,32 +2136,40 @@
           <a:lstStyle/>
           <a:p>
             <a:r>
+              <a:rPr dirty="0"/>
               <a:t>Script:</a:t>
             </a:r>
           </a:p>
           <a:p>
             <a:r>
+              <a:rPr dirty="0"/>
               <a:t>A useful analyst has to know where security data comes from. Identity systems show login behavior, MFA use, and password resets. Network systems show connections, DNS requests, VPN sessions, and unusual movement. Endpoints show process activity, malware detections, file changes, and device behavior. Cloud platforms show token use, admin actions, and storage access. None of these categories gives a full picture by itself. That is important because students may assume analytics is about finding one perfect log source. In practice, analysts usually work with partial visibility and try to combine signals. For Day 1, we are keeping the focus on identity data because it is practical, common, and easy to analyze with basic tools. But I still want students to see that authentication data sits inside a larger telemetry ecosystem.</a:t>
             </a:r>
           </a:p>
-          <a:p/>
-          <a:p>
-            <a:r>
+          <a:p>
+            <a:endParaRPr dirty="0"/>
+          </a:p>
+          <a:p>
+            <a:r>
+              <a:rPr dirty="0"/>
               <a:t>Mention:</a:t>
             </a:r>
           </a:p>
           <a:p>
             <a:r>
+              <a:rPr dirty="0"/>
               <a:t>- Name the telemetry families</a:t>
             </a:r>
           </a:p>
           <a:p>
             <a:r>
+              <a:rPr dirty="0"/>
               <a:t>- Explain partial visibility</a:t>
             </a:r>
           </a:p>
           <a:p>
             <a:r>
+              <a:rPr dirty="0"/>
               <a:t>- Justify why Day 1 focuses on identity logs</a:t>
             </a:r>
           </a:p>
@@ -2290,7 +2182,7 @@
             <a:spLocks noGrp="1"/>
           </p:cNvSpPr>
           <p:nvPr>
-            <p:ph type="sldNum" idx="5" sz="quarter"/>
+            <p:ph type="sldNum" sz="quarter" idx="5"/>
           </p:nvPr>
         </p:nvSpPr>
         <p:spPr/>
@@ -2304,7 +2196,7 @@
 </file>
 
 <file path=ppt/notesSlides/notesSlide6.xml><?xml version="1.0" encoding="utf-8"?>
-<p:notes xmlns:a="http://schemas.openxmlformats.org/drawingml/2006/main" xmlns:p="http://schemas.openxmlformats.org/presentationml/2006/main" xmlns:r="http://schemas.openxmlformats.org/officeDocument/2006/relationships">
+<p:notes xmlns:a="http://schemas.openxmlformats.org/drawingml/2006/main" xmlns:r="http://schemas.openxmlformats.org/officeDocument/2006/relationships" xmlns:p="http://schemas.openxmlformats.org/presentationml/2006/main">
   <p:cSld>
     <p:spTree>
       <p:nvGrpSpPr>
@@ -2324,7 +2216,7 @@
         <p:nvSpPr>
           <p:cNvPr id="2" name="Slide Image Placeholder 1"/>
           <p:cNvSpPr>
-            <a:spLocks noGrp="1"/>
+            <a:spLocks noGrp="1" noRot="1" noChangeAspect="1"/>
           </p:cNvSpPr>
           <p:nvPr>
             <p:ph type="sldImg" idx="2"/>
@@ -2339,7 +2231,7 @@
             <a:spLocks noGrp="1"/>
           </p:cNvSpPr>
           <p:nvPr>
-            <p:ph type="body" idx="3" sz="quarter"/>
+            <p:ph type="body" sz="quarter" idx="3"/>
           </p:nvPr>
         </p:nvSpPr>
         <p:spPr/>
@@ -2348,32 +2240,40 @@
           <a:lstStyle/>
           <a:p>
             <a:r>
+              <a:rPr dirty="0"/>
               <a:t>Script:</a:t>
             </a:r>
           </a:p>
           <a:p>
             <a:r>
+              <a:rPr dirty="0"/>
               <a:t>Students often use the words event, alert, and incident as if they mean the same thing. They do not. An event is simply a recorded activity. One failed login is an event. An alert is a signal that says a pattern might matter. Many failed logins from one source, or a rare admin action, may become an alert because a rule or a human notices it. An incident is further along the chain. It means we have enough evidence to believe there is an actual security problem requiring response and tracking. This distinction is not just vocabulary practice. It affects how security teams work. If students confuse an event with an incident, they will overreact. If they treat alerts like harmless events, they will underreact. So I want them to get comfortable with the idea that analytics helps move us from raw activity toward justified response.</a:t>
             </a:r>
           </a:p>
-          <a:p/>
-          <a:p>
-            <a:r>
+          <a:p>
+            <a:endParaRPr dirty="0"/>
+          </a:p>
+          <a:p>
+            <a:r>
+              <a:rPr dirty="0"/>
               <a:t>Mention:</a:t>
             </a:r>
           </a:p>
           <a:p>
             <a:r>
+              <a:rPr dirty="0"/>
               <a:t>- Clarify the three terms carefully</a:t>
             </a:r>
           </a:p>
           <a:p>
             <a:r>
+              <a:rPr dirty="0"/>
               <a:t>- Use failed login as running example</a:t>
             </a:r>
           </a:p>
           <a:p>
             <a:r>
+              <a:rPr dirty="0"/>
               <a:t>- Explain why vocabulary affects response quality</a:t>
             </a:r>
           </a:p>
@@ -2386,7 +2286,7 @@
             <a:spLocks noGrp="1"/>
           </p:cNvSpPr>
           <p:nvPr>
-            <p:ph type="sldNum" idx="5" sz="quarter"/>
+            <p:ph type="sldNum" sz="quarter" idx="5"/>
           </p:nvPr>
         </p:nvSpPr>
         <p:spPr/>
@@ -2400,7 +2300,7 @@
 </file>
 
 <file path=ppt/notesSlides/notesSlide7.xml><?xml version="1.0" encoding="utf-8"?>
-<p:notes xmlns:a="http://schemas.openxmlformats.org/drawingml/2006/main" xmlns:p="http://schemas.openxmlformats.org/presentationml/2006/main" xmlns:r="http://schemas.openxmlformats.org/officeDocument/2006/relationships">
+<p:notes xmlns:a="http://schemas.openxmlformats.org/drawingml/2006/main" xmlns:r="http://schemas.openxmlformats.org/officeDocument/2006/relationships" xmlns:p="http://schemas.openxmlformats.org/presentationml/2006/main">
   <p:cSld>
     <p:spTree>
       <p:nvGrpSpPr>
@@ -2420,7 +2320,7 @@
         <p:nvSpPr>
           <p:cNvPr id="2" name="Slide Image Placeholder 1"/>
           <p:cNvSpPr>
-            <a:spLocks noGrp="1"/>
+            <a:spLocks noGrp="1" noRot="1" noChangeAspect="1"/>
           </p:cNvSpPr>
           <p:nvPr>
             <p:ph type="sldImg" idx="2"/>
@@ -2435,7 +2335,7 @@
             <a:spLocks noGrp="1"/>
           </p:cNvSpPr>
           <p:nvPr>
-            <p:ph type="body" idx="3" sz="quarter"/>
+            <p:ph type="body" sz="quarter" idx="3"/>
           </p:nvPr>
         </p:nvSpPr>
         <p:spPr/>
@@ -2444,32 +2344,40 @@
           <a:lstStyle/>
           <a:p>
             <a:r>
+              <a:rPr dirty="0"/>
               <a:t>Script:</a:t>
             </a:r>
           </a:p>
           <a:p>
             <a:r>
+              <a:rPr dirty="0"/>
               <a:t>Authentication data is one of the best places to start because it is both common and meaningful. Almost every organization has some kind of login system. Account compromise is also one of the most common paths into a larger incident. That makes authentication logs a practical source for student labs and early-career work. Authentication data can show repeated failure patterns, unusual location changes, success after suspicious failures, MFA fatigue behavior, and many other signals. It is not perfect. Attackers can hide, and not every strange login is malicious. But the data is structured enough that students can do meaningful analysis without needing to write code or learn a complicated platform first. That makes it a strong teaching choice for the first day of the analytics unit.</a:t>
             </a:r>
           </a:p>
-          <a:p/>
-          <a:p>
-            <a:r>
+          <a:p>
+            <a:endParaRPr dirty="0"/>
+          </a:p>
+          <a:p>
+            <a:r>
+              <a:rPr dirty="0"/>
               <a:t>Mention:</a:t>
             </a:r>
           </a:p>
           <a:p>
             <a:r>
+              <a:rPr dirty="0"/>
               <a:t>- Explain why auth logs are a practical starting point</a:t>
             </a:r>
           </a:p>
           <a:p>
             <a:r>
+              <a:rPr dirty="0"/>
               <a:t>- Name common auth-related patterns</a:t>
             </a:r>
           </a:p>
           <a:p>
             <a:r>
+              <a:rPr dirty="0"/>
               <a:t>- Keep the emphasis on structured, accessible data</a:t>
             </a:r>
           </a:p>
@@ -2482,7 +2390,7 @@
             <a:spLocks noGrp="1"/>
           </p:cNvSpPr>
           <p:nvPr>
-            <p:ph type="sldNum" idx="5" sz="quarter"/>
+            <p:ph type="sldNum" sz="quarter" idx="5"/>
           </p:nvPr>
         </p:nvSpPr>
         <p:spPr/>
@@ -2496,7 +2404,7 @@
 </file>
 
 <file path=ppt/notesSlides/notesSlide8.xml><?xml version="1.0" encoding="utf-8"?>
-<p:notes xmlns:a="http://schemas.openxmlformats.org/drawingml/2006/main" xmlns:p="http://schemas.openxmlformats.org/presentationml/2006/main" xmlns:r="http://schemas.openxmlformats.org/officeDocument/2006/relationships">
+<p:notes xmlns:a="http://schemas.openxmlformats.org/drawingml/2006/main" xmlns:r="http://schemas.openxmlformats.org/officeDocument/2006/relationships" xmlns:p="http://schemas.openxmlformats.org/presentationml/2006/main">
   <p:cSld>
     <p:spTree>
       <p:nvGrpSpPr>
@@ -2516,7 +2424,7 @@
         <p:nvSpPr>
           <p:cNvPr id="2" name="Slide Image Placeholder 1"/>
           <p:cNvSpPr>
-            <a:spLocks noGrp="1"/>
+            <a:spLocks noGrp="1" noRot="1" noChangeAspect="1"/>
           </p:cNvSpPr>
           <p:nvPr>
             <p:ph type="sldImg" idx="2"/>
@@ -2531,7 +2439,7 @@
             <a:spLocks noGrp="1"/>
           </p:cNvSpPr>
           <p:nvPr>
-            <p:ph type="body" idx="3" sz="quarter"/>
+            <p:ph type="body" sz="quarter" idx="3"/>
           </p:nvPr>
         </p:nvSpPr>
         <p:spPr/>
@@ -2540,32 +2448,40 @@
           <a:lstStyle/>
           <a:p>
             <a:r>
+              <a:rPr dirty="0"/>
               <a:t>Script:</a:t>
             </a:r>
           </a:p>
           <a:p>
             <a:r>
+              <a:rPr dirty="0"/>
               <a:t>Many beginner mistakes come from reading logs too loosely. Analysts do not need to understand every field immediately, but they do need to anchor themselves in a small set of investigative fields. Time tells us when something happened, how often it happened, and in what order. Source tells us where it came from, whether the IP or device looks familiar, and whether geography is plausible. Target tells us who or what was affected: the account, system, role, or privilege level. Outcome tells us whether the attempt succeeded, failed, triggered a reset, or hit an MFA problem. That may sound basic, but this is where real security reasoning starts. If students learn to read those four categories carefully, they can begin to build a coherent story from raw event rows.</a:t>
             </a:r>
           </a:p>
-          <a:p/>
-          <a:p>
-            <a:r>
+          <a:p>
+            <a:endParaRPr dirty="0"/>
+          </a:p>
+          <a:p>
+            <a:r>
+              <a:rPr dirty="0"/>
               <a:t>Mention:</a:t>
             </a:r>
           </a:p>
           <a:p>
             <a:r>
+              <a:rPr dirty="0"/>
               <a:t>- Anchor students in time, source, target, and outcome</a:t>
             </a:r>
           </a:p>
           <a:p>
             <a:r>
+              <a:rPr dirty="0"/>
               <a:t>- Explain each category in practical terms</a:t>
             </a:r>
           </a:p>
           <a:p>
             <a:r>
+              <a:rPr dirty="0"/>
               <a:t>- Reduce the feeling of log overload</a:t>
             </a:r>
           </a:p>
@@ -2578,7 +2494,7 @@
             <a:spLocks noGrp="1"/>
           </p:cNvSpPr>
           <p:nvPr>
-            <p:ph type="sldNum" idx="5" sz="quarter"/>
+            <p:ph type="sldNum" sz="quarter" idx="5"/>
           </p:nvPr>
         </p:nvSpPr>
         <p:spPr/>
@@ -2592,7 +2508,7 @@
 </file>
 
 <file path=ppt/notesSlides/notesSlide9.xml><?xml version="1.0" encoding="utf-8"?>
-<p:notes xmlns:a="http://schemas.openxmlformats.org/drawingml/2006/main" xmlns:p="http://schemas.openxmlformats.org/presentationml/2006/main" xmlns:r="http://schemas.openxmlformats.org/officeDocument/2006/relationships">
+<p:notes xmlns:a="http://schemas.openxmlformats.org/drawingml/2006/main" xmlns:r="http://schemas.openxmlformats.org/officeDocument/2006/relationships" xmlns:p="http://schemas.openxmlformats.org/presentationml/2006/main">
   <p:cSld>
     <p:spTree>
       <p:nvGrpSpPr>
@@ -2612,7 +2528,7 @@
         <p:nvSpPr>
           <p:cNvPr id="2" name="Slide Image Placeholder 1"/>
           <p:cNvSpPr>
-            <a:spLocks noGrp="1"/>
+            <a:spLocks noGrp="1" noRot="1" noChangeAspect="1"/>
           </p:cNvSpPr>
           <p:nvPr>
             <p:ph type="sldImg" idx="2"/>
@@ -2627,7 +2543,7 @@
             <a:spLocks noGrp="1"/>
           </p:cNvSpPr>
           <p:nvPr>
-            <p:ph type="body" idx="3" sz="quarter"/>
+            <p:ph type="body" sz="quarter" idx="3"/>
           </p:nvPr>
         </p:nvSpPr>
         <p:spPr/>
@@ -2636,32 +2552,40 @@
           <a:lstStyle/>
           <a:p>
             <a:r>
+              <a:rPr dirty="0"/>
               <a:t>Script:</a:t>
             </a:r>
           </a:p>
           <a:p>
             <a:r>
+              <a:rPr dirty="0"/>
               <a:t>A lot of security analytics starts with very simple counting. That point matters because students often assume good analytics has to be mathematically complex. In reality, one of the first questions is often just: what repeats? You can count failures by IP, failures by user, successes after failures, or rare event types. You can compare whether one source touched many users, whether one user appeared from many sources, or whether a new device suddenly became active. These are not glamorous operations, but they are powerful because attackers usually create repetition somewhere. Counting is one of the easiest ways to turn raw logs into suspicious pattern candidates. It also gives students a concrete, practical habit they can use immediately in the lab and later in internships or junior analyst roles.</a:t>
             </a:r>
           </a:p>
-          <a:p/>
-          <a:p>
-            <a:r>
+          <a:p>
+            <a:endParaRPr dirty="0"/>
+          </a:p>
+          <a:p>
+            <a:r>
+              <a:rPr dirty="0"/>
               <a:t>Mention:</a:t>
             </a:r>
           </a:p>
           <a:p>
             <a:r>
+              <a:rPr dirty="0"/>
               <a:t>- Normalize simple counting as real analytics</a:t>
             </a:r>
           </a:p>
           <a:p>
             <a:r>
+              <a:rPr dirty="0"/>
               <a:t>- Show how repetition reveals patterns</a:t>
             </a:r>
           </a:p>
           <a:p>
             <a:r>
+              <a:rPr dirty="0"/>
               <a:t>- Prepare students for spreadsheet-based work</a:t>
             </a:r>
           </a:p>
@@ -2674,7 +2598,7 @@
             <a:spLocks noGrp="1"/>
           </p:cNvSpPr>
           <p:nvPr>
-            <p:ph type="sldNum" idx="5" sz="quarter"/>
+            <p:ph type="sldNum" sz="quarter" idx="5"/>
           </p:nvPr>
         </p:nvSpPr>
         <p:spPr/>
@@ -2725,10 +2649,9 @@
           <a:lstStyle/>
           <a:p>
             <a:r>
-              <a:rPr lang="en-US" smtClean="0"/>
+              <a:rPr lang="en-US"/>
               <a:t>Click to edit Master title style</a:t>
             </a:r>
-            <a:endParaRPr lang="en-US"/>
           </a:p>
         </p:txBody>
       </p:sp>
@@ -2844,10 +2767,9 @@
           </a:lstStyle>
           <a:p>
             <a:r>
-              <a:rPr lang="en-US" smtClean="0"/>
+              <a:rPr lang="en-US"/>
               <a:t>Click to edit Master subtitle style</a:t>
             </a:r>
-            <a:endParaRPr lang="en-US"/>
           </a:p>
         </p:txBody>
       </p:sp>
@@ -2868,7 +2790,7 @@
           <a:p>
             <a:fld id="{5BCAD085-E8A6-8845-BD4E-CB4CCA059FC4}" type="datetimeFigureOut">
               <a:rPr lang="en-US" smtClean="0"/>
-              <a:t>1/27/13</a:t>
+              <a:t>4/21/26</a:t>
             </a:fld>
             <a:endParaRPr lang="en-US"/>
           </a:p>
@@ -2962,10 +2884,9 @@
           <a:lstStyle/>
           <a:p>
             <a:r>
-              <a:rPr lang="en-US" smtClean="0"/>
+              <a:rPr lang="en-US"/>
               <a:t>Click to edit Master title style</a:t>
             </a:r>
-            <a:endParaRPr lang="en-US"/>
           </a:p>
         </p:txBody>
       </p:sp>
@@ -2986,38 +2907,37 @@
           <a:p>
             <a:pPr lvl="0"/>
             <a:r>
-              <a:rPr lang="en-US" smtClean="0"/>
+              <a:rPr lang="en-US"/>
               <a:t>Click to edit Master text styles</a:t>
             </a:r>
           </a:p>
           <a:p>
             <a:pPr lvl="1"/>
             <a:r>
-              <a:rPr lang="en-US" smtClean="0"/>
+              <a:rPr lang="en-US"/>
               <a:t>Second level</a:t>
             </a:r>
           </a:p>
           <a:p>
             <a:pPr lvl="2"/>
             <a:r>
-              <a:rPr lang="en-US" smtClean="0"/>
+              <a:rPr lang="en-US"/>
               <a:t>Third level</a:t>
             </a:r>
           </a:p>
           <a:p>
             <a:pPr lvl="3"/>
             <a:r>
-              <a:rPr lang="en-US" smtClean="0"/>
+              <a:rPr lang="en-US"/>
               <a:t>Fourth level</a:t>
             </a:r>
           </a:p>
           <a:p>
             <a:pPr lvl="4"/>
             <a:r>
-              <a:rPr lang="en-US" smtClean="0"/>
+              <a:rPr lang="en-US"/>
               <a:t>Fifth level</a:t>
             </a:r>
-            <a:endParaRPr lang="en-US"/>
           </a:p>
         </p:txBody>
       </p:sp>
@@ -3038,7 +2958,7 @@
           <a:p>
             <a:fld id="{5BCAD085-E8A6-8845-BD4E-CB4CCA059FC4}" type="datetimeFigureOut">
               <a:rPr lang="en-US" smtClean="0"/>
-              <a:t>1/27/13</a:t>
+              <a:t>4/21/26</a:t>
             </a:fld>
             <a:endParaRPr lang="en-US"/>
           </a:p>
@@ -3137,10 +3057,9 @@
           <a:lstStyle/>
           <a:p>
             <a:r>
-              <a:rPr lang="en-US" smtClean="0"/>
+              <a:rPr lang="en-US"/>
               <a:t>Click to edit Master title style</a:t>
             </a:r>
-            <a:endParaRPr lang="en-US"/>
           </a:p>
         </p:txBody>
       </p:sp>
@@ -3166,38 +3085,37 @@
           <a:p>
             <a:pPr lvl="0"/>
             <a:r>
-              <a:rPr lang="en-US" smtClean="0"/>
+              <a:rPr lang="en-US"/>
               <a:t>Click to edit Master text styles</a:t>
             </a:r>
           </a:p>
           <a:p>
             <a:pPr lvl="1"/>
             <a:r>
-              <a:rPr lang="en-US" smtClean="0"/>
+              <a:rPr lang="en-US"/>
               <a:t>Second level</a:t>
             </a:r>
           </a:p>
           <a:p>
             <a:pPr lvl="2"/>
             <a:r>
-              <a:rPr lang="en-US" smtClean="0"/>
+              <a:rPr lang="en-US"/>
               <a:t>Third level</a:t>
             </a:r>
           </a:p>
           <a:p>
             <a:pPr lvl="3"/>
             <a:r>
-              <a:rPr lang="en-US" smtClean="0"/>
+              <a:rPr lang="en-US"/>
               <a:t>Fourth level</a:t>
             </a:r>
           </a:p>
           <a:p>
             <a:pPr lvl="4"/>
             <a:r>
-              <a:rPr lang="en-US" smtClean="0"/>
+              <a:rPr lang="en-US"/>
               <a:t>Fifth level</a:t>
             </a:r>
-            <a:endParaRPr lang="en-US"/>
           </a:p>
         </p:txBody>
       </p:sp>
@@ -3218,7 +3136,7 @@
           <a:p>
             <a:fld id="{5BCAD085-E8A6-8845-BD4E-CB4CCA059FC4}" type="datetimeFigureOut">
               <a:rPr lang="en-US" smtClean="0"/>
-              <a:t>1/27/13</a:t>
+              <a:t>4/21/26</a:t>
             </a:fld>
             <a:endParaRPr lang="en-US"/>
           </a:p>
@@ -3312,10 +3230,9 @@
           <a:lstStyle/>
           <a:p>
             <a:r>
-              <a:rPr lang="en-US" smtClean="0"/>
+              <a:rPr lang="en-US"/>
               <a:t>Click to edit Master title style</a:t>
             </a:r>
-            <a:endParaRPr lang="en-US"/>
           </a:p>
         </p:txBody>
       </p:sp>
@@ -3336,38 +3253,37 @@
           <a:p>
             <a:pPr lvl="0"/>
             <a:r>
-              <a:rPr lang="en-US" smtClean="0"/>
+              <a:rPr lang="en-US"/>
               <a:t>Click to edit Master text styles</a:t>
             </a:r>
           </a:p>
           <a:p>
             <a:pPr lvl="1"/>
             <a:r>
-              <a:rPr lang="en-US" smtClean="0"/>
+              <a:rPr lang="en-US"/>
               <a:t>Second level</a:t>
             </a:r>
           </a:p>
           <a:p>
             <a:pPr lvl="2"/>
             <a:r>
-              <a:rPr lang="en-US" smtClean="0"/>
+              <a:rPr lang="en-US"/>
               <a:t>Third level</a:t>
             </a:r>
           </a:p>
           <a:p>
             <a:pPr lvl="3"/>
             <a:r>
-              <a:rPr lang="en-US" smtClean="0"/>
+              <a:rPr lang="en-US"/>
               <a:t>Fourth level</a:t>
             </a:r>
           </a:p>
           <a:p>
             <a:pPr lvl="4"/>
             <a:r>
-              <a:rPr lang="en-US" smtClean="0"/>
+              <a:rPr lang="en-US"/>
               <a:t>Fifth level</a:t>
             </a:r>
-            <a:endParaRPr lang="en-US"/>
           </a:p>
         </p:txBody>
       </p:sp>
@@ -3388,7 +3304,7 @@
           <a:p>
             <a:fld id="{5BCAD085-E8A6-8845-BD4E-CB4CCA059FC4}" type="datetimeFigureOut">
               <a:rPr lang="en-US" smtClean="0"/>
-              <a:t>1/27/13</a:t>
+              <a:t>4/21/26</a:t>
             </a:fld>
             <a:endParaRPr lang="en-US"/>
           </a:p>
@@ -3491,10 +3407,9 @@
           </a:lstStyle>
           <a:p>
             <a:r>
-              <a:rPr lang="en-US" smtClean="0"/>
+              <a:rPr lang="en-US"/>
               <a:t>Click to edit Master title style</a:t>
             </a:r>
-            <a:endParaRPr lang="en-US"/>
           </a:p>
         </p:txBody>
       </p:sp>
@@ -3611,7 +3526,7 @@
           <a:p>
             <a:pPr lvl="0"/>
             <a:r>
-              <a:rPr lang="en-US" smtClean="0"/>
+              <a:rPr lang="en-US"/>
               <a:t>Click to edit Master text styles</a:t>
             </a:r>
           </a:p>
@@ -3634,7 +3549,7 @@
           <a:p>
             <a:fld id="{5BCAD085-E8A6-8845-BD4E-CB4CCA059FC4}" type="datetimeFigureOut">
               <a:rPr lang="en-US" smtClean="0"/>
-              <a:t>1/27/13</a:t>
+              <a:t>4/21/26</a:t>
             </a:fld>
             <a:endParaRPr lang="en-US"/>
           </a:p>
@@ -3728,10 +3643,9 @@
           <a:lstStyle/>
           <a:p>
             <a:r>
-              <a:rPr lang="en-US" smtClean="0"/>
+              <a:rPr lang="en-US"/>
               <a:t>Click to edit Master title style</a:t>
             </a:r>
-            <a:endParaRPr lang="en-US"/>
           </a:p>
         </p:txBody>
       </p:sp>
@@ -3785,38 +3699,37 @@
           <a:p>
             <a:pPr lvl="0"/>
             <a:r>
-              <a:rPr lang="en-US" smtClean="0"/>
+              <a:rPr lang="en-US"/>
               <a:t>Click to edit Master text styles</a:t>
             </a:r>
           </a:p>
           <a:p>
             <a:pPr lvl="1"/>
             <a:r>
-              <a:rPr lang="en-US" smtClean="0"/>
+              <a:rPr lang="en-US"/>
               <a:t>Second level</a:t>
             </a:r>
           </a:p>
           <a:p>
             <a:pPr lvl="2"/>
             <a:r>
-              <a:rPr lang="en-US" smtClean="0"/>
+              <a:rPr lang="en-US"/>
               <a:t>Third level</a:t>
             </a:r>
           </a:p>
           <a:p>
             <a:pPr lvl="3"/>
             <a:r>
-              <a:rPr lang="en-US" smtClean="0"/>
+              <a:rPr lang="en-US"/>
               <a:t>Fourth level</a:t>
             </a:r>
           </a:p>
           <a:p>
             <a:pPr lvl="4"/>
             <a:r>
-              <a:rPr lang="en-US" smtClean="0"/>
+              <a:rPr lang="en-US"/>
               <a:t>Fifth level</a:t>
             </a:r>
-            <a:endParaRPr lang="en-US"/>
           </a:p>
         </p:txBody>
       </p:sp>
@@ -3870,38 +3783,37 @@
           <a:p>
             <a:pPr lvl="0"/>
             <a:r>
-              <a:rPr lang="en-US" smtClean="0"/>
+              <a:rPr lang="en-US"/>
               <a:t>Click to edit Master text styles</a:t>
             </a:r>
           </a:p>
           <a:p>
             <a:pPr lvl="1"/>
             <a:r>
-              <a:rPr lang="en-US" smtClean="0"/>
+              <a:rPr lang="en-US"/>
               <a:t>Second level</a:t>
             </a:r>
           </a:p>
           <a:p>
             <a:pPr lvl="2"/>
             <a:r>
-              <a:rPr lang="en-US" smtClean="0"/>
+              <a:rPr lang="en-US"/>
               <a:t>Third level</a:t>
             </a:r>
           </a:p>
           <a:p>
             <a:pPr lvl="3"/>
             <a:r>
-              <a:rPr lang="en-US" smtClean="0"/>
+              <a:rPr lang="en-US"/>
               <a:t>Fourth level</a:t>
             </a:r>
           </a:p>
           <a:p>
             <a:pPr lvl="4"/>
             <a:r>
-              <a:rPr lang="en-US" smtClean="0"/>
+              <a:rPr lang="en-US"/>
               <a:t>Fifth level</a:t>
             </a:r>
-            <a:endParaRPr lang="en-US"/>
           </a:p>
         </p:txBody>
       </p:sp>
@@ -3922,7 +3834,7 @@
           <a:p>
             <a:fld id="{5BCAD085-E8A6-8845-BD4E-CB4CCA059FC4}" type="datetimeFigureOut">
               <a:rPr lang="en-US" smtClean="0"/>
-              <a:t>1/27/13</a:t>
+              <a:t>4/21/26</a:t>
             </a:fld>
             <a:endParaRPr lang="en-US"/>
           </a:p>
@@ -4020,10 +3932,9 @@
           </a:lstStyle>
           <a:p>
             <a:r>
-              <a:rPr lang="en-US" smtClean="0"/>
+              <a:rPr lang="en-US"/>
               <a:t>Click to edit Master title style</a:t>
             </a:r>
-            <a:endParaRPr lang="en-US"/>
           </a:p>
         </p:txBody>
       </p:sp>
@@ -4086,7 +3997,7 @@
           <a:p>
             <a:pPr lvl="0"/>
             <a:r>
-              <a:rPr lang="en-US" smtClean="0"/>
+              <a:rPr lang="en-US"/>
               <a:t>Click to edit Master text styles</a:t>
             </a:r>
           </a:p>
@@ -4142,38 +4053,37 @@
           <a:p>
             <a:pPr lvl="0"/>
             <a:r>
-              <a:rPr lang="en-US" smtClean="0"/>
+              <a:rPr lang="en-US"/>
               <a:t>Click to edit Master text styles</a:t>
             </a:r>
           </a:p>
           <a:p>
             <a:pPr lvl="1"/>
             <a:r>
-              <a:rPr lang="en-US" smtClean="0"/>
+              <a:rPr lang="en-US"/>
               <a:t>Second level</a:t>
             </a:r>
           </a:p>
           <a:p>
             <a:pPr lvl="2"/>
             <a:r>
-              <a:rPr lang="en-US" smtClean="0"/>
+              <a:rPr lang="en-US"/>
               <a:t>Third level</a:t>
             </a:r>
           </a:p>
           <a:p>
             <a:pPr lvl="3"/>
             <a:r>
-              <a:rPr lang="en-US" smtClean="0"/>
+              <a:rPr lang="en-US"/>
               <a:t>Fourth level</a:t>
             </a:r>
           </a:p>
           <a:p>
             <a:pPr lvl="4"/>
             <a:r>
-              <a:rPr lang="en-US" smtClean="0"/>
+              <a:rPr lang="en-US"/>
               <a:t>Fifth level</a:t>
             </a:r>
-            <a:endParaRPr lang="en-US"/>
           </a:p>
         </p:txBody>
       </p:sp>
@@ -4236,7 +4146,7 @@
           <a:p>
             <a:pPr lvl="0"/>
             <a:r>
-              <a:rPr lang="en-US" smtClean="0"/>
+              <a:rPr lang="en-US"/>
               <a:t>Click to edit Master text styles</a:t>
             </a:r>
           </a:p>
@@ -4292,38 +4202,37 @@
           <a:p>
             <a:pPr lvl="0"/>
             <a:r>
-              <a:rPr lang="en-US" smtClean="0"/>
+              <a:rPr lang="en-US"/>
               <a:t>Click to edit Master text styles</a:t>
             </a:r>
           </a:p>
           <a:p>
             <a:pPr lvl="1"/>
             <a:r>
-              <a:rPr lang="en-US" smtClean="0"/>
+              <a:rPr lang="en-US"/>
               <a:t>Second level</a:t>
             </a:r>
           </a:p>
           <a:p>
             <a:pPr lvl="2"/>
             <a:r>
-              <a:rPr lang="en-US" smtClean="0"/>
+              <a:rPr lang="en-US"/>
               <a:t>Third level</a:t>
             </a:r>
           </a:p>
           <a:p>
             <a:pPr lvl="3"/>
             <a:r>
-              <a:rPr lang="en-US" smtClean="0"/>
+              <a:rPr lang="en-US"/>
               <a:t>Fourth level</a:t>
             </a:r>
           </a:p>
           <a:p>
             <a:pPr lvl="4"/>
             <a:r>
-              <a:rPr lang="en-US" smtClean="0"/>
+              <a:rPr lang="en-US"/>
               <a:t>Fifth level</a:t>
             </a:r>
-            <a:endParaRPr lang="en-US"/>
           </a:p>
         </p:txBody>
       </p:sp>
@@ -4344,7 +4253,7 @@
           <a:p>
             <a:fld id="{5BCAD085-E8A6-8845-BD4E-CB4CCA059FC4}" type="datetimeFigureOut">
               <a:rPr lang="en-US" smtClean="0"/>
-              <a:t>1/27/13</a:t>
+              <a:t>4/21/26</a:t>
             </a:fld>
             <a:endParaRPr lang="en-US"/>
           </a:p>
@@ -4438,10 +4347,9 @@
           <a:lstStyle/>
           <a:p>
             <a:r>
-              <a:rPr lang="en-US" smtClean="0"/>
+              <a:rPr lang="en-US"/>
               <a:t>Click to edit Master title style</a:t>
             </a:r>
-            <a:endParaRPr lang="en-US"/>
           </a:p>
         </p:txBody>
       </p:sp>
@@ -4462,7 +4370,7 @@
           <a:p>
             <a:fld id="{5BCAD085-E8A6-8845-BD4E-CB4CCA059FC4}" type="datetimeFigureOut">
               <a:rPr lang="en-US" smtClean="0"/>
-              <a:t>1/27/13</a:t>
+              <a:t>4/21/26</a:t>
             </a:fld>
             <a:endParaRPr lang="en-US"/>
           </a:p>
@@ -4557,7 +4465,7 @@
           <a:p>
             <a:fld id="{5BCAD085-E8A6-8845-BD4E-CB4CCA059FC4}" type="datetimeFigureOut">
               <a:rPr lang="en-US" smtClean="0"/>
-              <a:t>1/27/13</a:t>
+              <a:t>4/21/26</a:t>
             </a:fld>
             <a:endParaRPr lang="en-US"/>
           </a:p>
@@ -4660,10 +4568,9 @@
           </a:lstStyle>
           <a:p>
             <a:r>
-              <a:rPr lang="en-US" smtClean="0"/>
+              <a:rPr lang="en-US"/>
               <a:t>Click to edit Master title style</a:t>
             </a:r>
-            <a:endParaRPr lang="en-US"/>
           </a:p>
         </p:txBody>
       </p:sp>
@@ -4717,38 +4624,37 @@
           <a:p>
             <a:pPr lvl="0"/>
             <a:r>
-              <a:rPr lang="en-US" smtClean="0"/>
+              <a:rPr lang="en-US"/>
               <a:t>Click to edit Master text styles</a:t>
             </a:r>
           </a:p>
           <a:p>
             <a:pPr lvl="1"/>
             <a:r>
-              <a:rPr lang="en-US" smtClean="0"/>
+              <a:rPr lang="en-US"/>
               <a:t>Second level</a:t>
             </a:r>
           </a:p>
           <a:p>
             <a:pPr lvl="2"/>
             <a:r>
-              <a:rPr lang="en-US" smtClean="0"/>
+              <a:rPr lang="en-US"/>
               <a:t>Third level</a:t>
             </a:r>
           </a:p>
           <a:p>
             <a:pPr lvl="3"/>
             <a:r>
-              <a:rPr lang="en-US" smtClean="0"/>
+              <a:rPr lang="en-US"/>
               <a:t>Fourth level</a:t>
             </a:r>
           </a:p>
           <a:p>
             <a:pPr lvl="4"/>
             <a:r>
-              <a:rPr lang="en-US" smtClean="0"/>
+              <a:rPr lang="en-US"/>
               <a:t>Fifth level</a:t>
             </a:r>
-            <a:endParaRPr lang="en-US"/>
           </a:p>
         </p:txBody>
       </p:sp>
@@ -4811,7 +4717,7 @@
           <a:p>
             <a:pPr lvl="0"/>
             <a:r>
-              <a:rPr lang="en-US" smtClean="0"/>
+              <a:rPr lang="en-US"/>
               <a:t>Click to edit Master text styles</a:t>
             </a:r>
           </a:p>
@@ -4834,7 +4740,7 @@
           <a:p>
             <a:fld id="{5BCAD085-E8A6-8845-BD4E-CB4CCA059FC4}" type="datetimeFigureOut">
               <a:rPr lang="en-US" smtClean="0"/>
-              <a:t>1/27/13</a:t>
+              <a:t>4/21/26</a:t>
             </a:fld>
             <a:endParaRPr lang="en-US"/>
           </a:p>
@@ -4937,10 +4843,9 @@
           </a:lstStyle>
           <a:p>
             <a:r>
-              <a:rPr lang="en-US" smtClean="0"/>
+              <a:rPr lang="en-US"/>
               <a:t>Click to edit Master title style</a:t>
             </a:r>
-            <a:endParaRPr lang="en-US"/>
           </a:p>
         </p:txBody>
       </p:sp>
@@ -5064,7 +4969,7 @@
           <a:p>
             <a:pPr lvl="0"/>
             <a:r>
-              <a:rPr lang="en-US" smtClean="0"/>
+              <a:rPr lang="en-US"/>
               <a:t>Click to edit Master text styles</a:t>
             </a:r>
           </a:p>
@@ -5087,7 +4992,7 @@
           <a:p>
             <a:fld id="{5BCAD085-E8A6-8845-BD4E-CB4CCA059FC4}" type="datetimeFigureOut">
               <a:rPr lang="en-US" smtClean="0"/>
-              <a:t>1/27/13</a:t>
+              <a:t>4/21/26</a:t>
             </a:fld>
             <a:endParaRPr lang="en-US"/>
           </a:p>
@@ -5196,10 +5101,9 @@
           <a:lstStyle/>
           <a:p>
             <a:r>
-              <a:rPr lang="en-US" smtClean="0"/>
+              <a:rPr lang="en-US"/>
               <a:t>Click to edit Master title style</a:t>
             </a:r>
-            <a:endParaRPr lang="en-US"/>
           </a:p>
         </p:txBody>
       </p:sp>
@@ -5230,38 +5134,37 @@
           <a:p>
             <a:pPr lvl="0"/>
             <a:r>
-              <a:rPr lang="en-US" smtClean="0"/>
+              <a:rPr lang="en-US"/>
               <a:t>Click to edit Master text styles</a:t>
             </a:r>
           </a:p>
           <a:p>
             <a:pPr lvl="1"/>
             <a:r>
-              <a:rPr lang="en-US" smtClean="0"/>
+              <a:rPr lang="en-US"/>
               <a:t>Second level</a:t>
             </a:r>
           </a:p>
           <a:p>
             <a:pPr lvl="2"/>
             <a:r>
-              <a:rPr lang="en-US" smtClean="0"/>
+              <a:rPr lang="en-US"/>
               <a:t>Third level</a:t>
             </a:r>
           </a:p>
           <a:p>
             <a:pPr lvl="3"/>
             <a:r>
-              <a:rPr lang="en-US" smtClean="0"/>
+              <a:rPr lang="en-US"/>
               <a:t>Fourth level</a:t>
             </a:r>
           </a:p>
           <a:p>
             <a:pPr lvl="4"/>
             <a:r>
-              <a:rPr lang="en-US" smtClean="0"/>
+              <a:rPr lang="en-US"/>
               <a:t>Fifth level</a:t>
             </a:r>
-            <a:endParaRPr lang="en-US"/>
           </a:p>
         </p:txBody>
       </p:sp>
@@ -5300,7 +5203,7 @@
           <a:p>
             <a:fld id="{5BCAD085-E8A6-8845-BD4E-CB4CCA059FC4}" type="datetimeFigureOut">
               <a:rPr lang="en-US" smtClean="0"/>
-              <a:t>1/27/13</a:t>
+              <a:t>4/21/26</a:t>
             </a:fld>
             <a:endParaRPr lang="en-US"/>
           </a:p>
@@ -5659,7 +5562,7 @@
 </file>
 
 <file path=ppt/slides/slide1.xml><?xml version="1.0" encoding="utf-8"?>
-<p:sld xmlns:a="http://schemas.openxmlformats.org/drawingml/2006/main" xmlns:p="http://schemas.openxmlformats.org/presentationml/2006/main" xmlns:r="http://schemas.openxmlformats.org/officeDocument/2006/relationships">
+<p:sld xmlns:a="http://schemas.openxmlformats.org/drawingml/2006/main" xmlns:r="http://schemas.openxmlformats.org/officeDocument/2006/relationships" xmlns:p="http://schemas.openxmlformats.org/presentationml/2006/main">
   <p:cSld>
     <p:bg>
       <p:bgPr>
@@ -5675,7 +5578,14 @@
         <p:cNvGrpSpPr/>
         <p:nvPr/>
       </p:nvGrpSpPr>
-      <p:grpSpPr/>
+      <p:grpSpPr>
+        <a:xfrm>
+          <a:off x="0" y="0"/>
+          <a:ext cx="0" cy="0"/>
+          <a:chOff x="0" y="0"/>
+          <a:chExt cx="0" cy="0"/>
+        </a:xfrm>
+      </p:grpSpPr>
       <p:sp>
         <p:nvSpPr>
           <p:cNvPr id="2" name="Rectangle 1"/>
@@ -5718,6 +5628,7 @@
           <a:lstStyle/>
           <a:p>
             <a:pPr algn="ctr"/>
+            <a:endParaRPr/>
           </a:p>
         </p:txBody>
       </p:sp>
@@ -5799,6 +5710,7 @@
           <a:lstStyle/>
           <a:p>
             <a:pPr algn="ctr"/>
+            <a:endParaRPr/>
           </a:p>
         </p:txBody>
       </p:sp>
@@ -5883,6 +5795,7 @@
           <a:lstStyle/>
           <a:p>
             <a:pPr algn="ctr"/>
+            <a:endParaRPr/>
           </a:p>
         </p:txBody>
       </p:sp>
@@ -6038,6 +5951,7 @@
           <a:lstStyle/>
           <a:p>
             <a:pPr algn="ctr"/>
+            <a:endParaRPr/>
           </a:p>
         </p:txBody>
       </p:sp>
@@ -6225,6 +6139,7 @@
           <a:lstStyle/>
           <a:p>
             <a:pPr algn="ctr"/>
+            <a:endParaRPr/>
           </a:p>
         </p:txBody>
       </p:sp>
@@ -6331,7 +6246,7 @@
 </file>
 
 <file path=ppt/slides/slide10.xml><?xml version="1.0" encoding="utf-8"?>
-<p:sld xmlns:a="http://schemas.openxmlformats.org/drawingml/2006/main" xmlns:p="http://schemas.openxmlformats.org/presentationml/2006/main" xmlns:r="http://schemas.openxmlformats.org/officeDocument/2006/relationships">
+<p:sld xmlns:a="http://schemas.openxmlformats.org/drawingml/2006/main" xmlns:r="http://schemas.openxmlformats.org/officeDocument/2006/relationships" xmlns:p="http://schemas.openxmlformats.org/presentationml/2006/main">
   <p:cSld>
     <p:bg>
       <p:bgPr>
@@ -6347,7 +6262,14 @@
         <p:cNvGrpSpPr/>
         <p:nvPr/>
       </p:nvGrpSpPr>
-      <p:grpSpPr/>
+      <p:grpSpPr>
+        <a:xfrm>
+          <a:off x="0" y="0"/>
+          <a:ext cx="0" cy="0"/>
+          <a:chOff x="0" y="0"/>
+          <a:chExt cx="0" cy="0"/>
+        </a:xfrm>
+      </p:grpSpPr>
       <p:sp>
         <p:nvSpPr>
           <p:cNvPr id="2" name="Rounded Rectangle 1"/>
@@ -6516,6 +6438,7 @@
           <a:lstStyle/>
           <a:p>
             <a:pPr algn="ctr"/>
+            <a:endParaRPr/>
           </a:p>
         </p:txBody>
       </p:sp>
@@ -6687,6 +6610,7 @@
           <a:lstStyle/>
           <a:p>
             <a:pPr algn="ctr"/>
+            <a:endParaRPr/>
           </a:p>
         </p:txBody>
       </p:sp>
@@ -6825,7 +6749,7 @@
 </file>
 
 <file path=ppt/slides/slide11.xml><?xml version="1.0" encoding="utf-8"?>
-<p:sld xmlns:a="http://schemas.openxmlformats.org/drawingml/2006/main" xmlns:p="http://schemas.openxmlformats.org/presentationml/2006/main" xmlns:r="http://schemas.openxmlformats.org/officeDocument/2006/relationships">
+<p:sld xmlns:a="http://schemas.openxmlformats.org/drawingml/2006/main" xmlns:r="http://schemas.openxmlformats.org/officeDocument/2006/relationships" xmlns:p="http://schemas.openxmlformats.org/presentationml/2006/main">
   <p:cSld>
     <p:bg>
       <p:bgPr>
@@ -6841,7 +6765,14 @@
         <p:cNvGrpSpPr/>
         <p:nvPr/>
       </p:nvGrpSpPr>
-      <p:grpSpPr/>
+      <p:grpSpPr>
+        <a:xfrm>
+          <a:off x="0" y="0"/>
+          <a:ext cx="0" cy="0"/>
+          <a:chOff x="0" y="0"/>
+          <a:chExt cx="0" cy="0"/>
+        </a:xfrm>
+      </p:grpSpPr>
       <p:sp>
         <p:nvSpPr>
           <p:cNvPr id="2" name="Rounded Rectangle 1"/>
@@ -7010,6 +6941,7 @@
           <a:lstStyle/>
           <a:p>
             <a:pPr algn="ctr"/>
+            <a:endParaRPr/>
           </a:p>
         </p:txBody>
       </p:sp>
@@ -7165,6 +7097,7 @@
           <a:lstStyle/>
           <a:p>
             <a:pPr algn="ctr"/>
+            <a:endParaRPr/>
           </a:p>
         </p:txBody>
       </p:sp>
@@ -7320,6 +7253,7 @@
           <a:lstStyle/>
           <a:p>
             <a:pPr algn="ctr"/>
+            <a:endParaRPr/>
           </a:p>
         </p:txBody>
       </p:sp>
@@ -7426,7 +7360,7 @@
 </file>
 
 <file path=ppt/slides/slide12.xml><?xml version="1.0" encoding="utf-8"?>
-<p:sld xmlns:a="http://schemas.openxmlformats.org/drawingml/2006/main" xmlns:p="http://schemas.openxmlformats.org/presentationml/2006/main" xmlns:r="http://schemas.openxmlformats.org/officeDocument/2006/relationships">
+<p:sld xmlns:a="http://schemas.openxmlformats.org/drawingml/2006/main" xmlns:r="http://schemas.openxmlformats.org/officeDocument/2006/relationships" xmlns:p="http://schemas.openxmlformats.org/presentationml/2006/main">
   <p:cSld>
     <p:bg>
       <p:bgPr>
@@ -7442,7 +7376,14 @@
         <p:cNvGrpSpPr/>
         <p:nvPr/>
       </p:nvGrpSpPr>
-      <p:grpSpPr/>
+      <p:grpSpPr>
+        <a:xfrm>
+          <a:off x="0" y="0"/>
+          <a:ext cx="0" cy="0"/>
+          <a:chOff x="0" y="0"/>
+          <a:chExt cx="0" cy="0"/>
+        </a:xfrm>
+      </p:grpSpPr>
       <p:sp>
         <p:nvSpPr>
           <p:cNvPr id="2" name="Rounded Rectangle 1"/>
@@ -7611,6 +7552,7 @@
           <a:lstStyle/>
           <a:p>
             <a:pPr algn="ctr"/>
+            <a:endParaRPr/>
           </a:p>
         </p:txBody>
       </p:sp>
@@ -7782,6 +7724,7 @@
           <a:lstStyle/>
           <a:p>
             <a:pPr algn="ctr"/>
+            <a:endParaRPr/>
           </a:p>
         </p:txBody>
       </p:sp>
@@ -7936,7 +7879,7 @@
 </file>
 
 <file path=ppt/slides/slide13.xml><?xml version="1.0" encoding="utf-8"?>
-<p:sld xmlns:a="http://schemas.openxmlformats.org/drawingml/2006/main" xmlns:p="http://schemas.openxmlformats.org/presentationml/2006/main" xmlns:r="http://schemas.openxmlformats.org/officeDocument/2006/relationships">
+<p:sld xmlns:a="http://schemas.openxmlformats.org/drawingml/2006/main" xmlns:r="http://schemas.openxmlformats.org/officeDocument/2006/relationships" xmlns:p="http://schemas.openxmlformats.org/presentationml/2006/main">
   <p:cSld>
     <p:bg>
       <p:bgPr>
@@ -7952,7 +7895,14 @@
         <p:cNvGrpSpPr/>
         <p:nvPr/>
       </p:nvGrpSpPr>
-      <p:grpSpPr/>
+      <p:grpSpPr>
+        <a:xfrm>
+          <a:off x="0" y="0"/>
+          <a:ext cx="0" cy="0"/>
+          <a:chOff x="0" y="0"/>
+          <a:chExt cx="0" cy="0"/>
+        </a:xfrm>
+      </p:grpSpPr>
       <p:sp>
         <p:nvSpPr>
           <p:cNvPr id="2" name="Rounded Rectangle 1"/>
@@ -8121,6 +8071,7 @@
           <a:lstStyle/>
           <a:p>
             <a:pPr algn="ctr"/>
+            <a:endParaRPr/>
           </a:p>
         </p:txBody>
       </p:sp>
@@ -8308,6 +8259,7 @@
           <a:lstStyle/>
           <a:p>
             <a:pPr algn="ctr"/>
+            <a:endParaRPr/>
           </a:p>
         </p:txBody>
       </p:sp>
@@ -8447,6 +8399,7 @@
           <a:lstStyle/>
           <a:p>
             <a:pPr algn="ctr"/>
+            <a:endParaRPr/>
           </a:p>
         </p:txBody>
       </p:sp>
@@ -8553,7 +8506,7 @@
 </file>
 
 <file path=ppt/slides/slide14.xml><?xml version="1.0" encoding="utf-8"?>
-<p:sld xmlns:a="http://schemas.openxmlformats.org/drawingml/2006/main" xmlns:p="http://schemas.openxmlformats.org/presentationml/2006/main" xmlns:r="http://schemas.openxmlformats.org/officeDocument/2006/relationships">
+<p:sld xmlns:a="http://schemas.openxmlformats.org/drawingml/2006/main" xmlns:r="http://schemas.openxmlformats.org/officeDocument/2006/relationships" xmlns:p="http://schemas.openxmlformats.org/presentationml/2006/main">
   <p:cSld>
     <p:bg>
       <p:bgPr>
@@ -8569,7 +8522,14 @@
         <p:cNvGrpSpPr/>
         <p:nvPr/>
       </p:nvGrpSpPr>
-      <p:grpSpPr/>
+      <p:grpSpPr>
+        <a:xfrm>
+          <a:off x="0" y="0"/>
+          <a:ext cx="0" cy="0"/>
+          <a:chOff x="0" y="0"/>
+          <a:chExt cx="0" cy="0"/>
+        </a:xfrm>
+      </p:grpSpPr>
       <p:sp>
         <p:nvSpPr>
           <p:cNvPr id="2" name="Rounded Rectangle 1"/>
@@ -8738,6 +8698,7 @@
           <a:lstStyle/>
           <a:p>
             <a:pPr algn="ctr"/>
+            <a:endParaRPr/>
           </a:p>
         </p:txBody>
       </p:sp>
@@ -8909,6 +8870,7 @@
           <a:lstStyle/>
           <a:p>
             <a:pPr algn="ctr"/>
+            <a:endParaRPr/>
           </a:p>
         </p:txBody>
       </p:sp>
@@ -9080,6 +9042,7 @@
           <a:lstStyle/>
           <a:p>
             <a:pPr algn="ctr"/>
+            <a:endParaRPr/>
           </a:p>
         </p:txBody>
       </p:sp>
@@ -9251,6 +9214,7 @@
           <a:lstStyle/>
           <a:p>
             <a:pPr algn="ctr"/>
+            <a:endParaRPr/>
           </a:p>
         </p:txBody>
       </p:sp>
@@ -9373,7 +9337,7 @@
 </file>
 
 <file path=ppt/slides/slide15.xml><?xml version="1.0" encoding="utf-8"?>
-<p:sld xmlns:a="http://schemas.openxmlformats.org/drawingml/2006/main" xmlns:p="http://schemas.openxmlformats.org/presentationml/2006/main" xmlns:r="http://schemas.openxmlformats.org/officeDocument/2006/relationships">
+<p:sld xmlns:a="http://schemas.openxmlformats.org/drawingml/2006/main" xmlns:r="http://schemas.openxmlformats.org/officeDocument/2006/relationships" xmlns:p="http://schemas.openxmlformats.org/presentationml/2006/main">
   <p:cSld>
     <p:bg>
       <p:bgPr>
@@ -9389,7 +9353,14 @@
         <p:cNvGrpSpPr/>
         <p:nvPr/>
       </p:nvGrpSpPr>
-      <p:grpSpPr/>
+      <p:grpSpPr>
+        <a:xfrm>
+          <a:off x="0" y="0"/>
+          <a:ext cx="0" cy="0"/>
+          <a:chOff x="0" y="0"/>
+          <a:chExt cx="0" cy="0"/>
+        </a:xfrm>
+      </p:grpSpPr>
       <p:sp>
         <p:nvSpPr>
           <p:cNvPr id="2" name="Rounded Rectangle 1"/>
@@ -9558,6 +9529,7 @@
           <a:lstStyle/>
           <a:p>
             <a:pPr algn="ctr"/>
+            <a:endParaRPr/>
           </a:p>
         </p:txBody>
       </p:sp>
@@ -9729,6 +9701,7 @@
           <a:lstStyle/>
           <a:p>
             <a:pPr algn="ctr"/>
+            <a:endParaRPr/>
           </a:p>
         </p:txBody>
       </p:sp>
@@ -9868,6 +9841,7 @@
           <a:lstStyle/>
           <a:p>
             <a:pPr algn="ctr"/>
+            <a:endParaRPr/>
           </a:p>
         </p:txBody>
       </p:sp>
@@ -9974,7 +9948,7 @@
 </file>
 
 <file path=ppt/slides/slide16.xml><?xml version="1.0" encoding="utf-8"?>
-<p:sld xmlns:a="http://schemas.openxmlformats.org/drawingml/2006/main" xmlns:p="http://schemas.openxmlformats.org/presentationml/2006/main" xmlns:r="http://schemas.openxmlformats.org/officeDocument/2006/relationships">
+<p:sld xmlns:a="http://schemas.openxmlformats.org/drawingml/2006/main" xmlns:r="http://schemas.openxmlformats.org/officeDocument/2006/relationships" xmlns:p="http://schemas.openxmlformats.org/presentationml/2006/main">
   <p:cSld>
     <p:bg>
       <p:bgPr>
@@ -9990,7 +9964,14 @@
         <p:cNvGrpSpPr/>
         <p:nvPr/>
       </p:nvGrpSpPr>
-      <p:grpSpPr/>
+      <p:grpSpPr>
+        <a:xfrm>
+          <a:off x="0" y="0"/>
+          <a:ext cx="0" cy="0"/>
+          <a:chOff x="0" y="0"/>
+          <a:chExt cx="0" cy="0"/>
+        </a:xfrm>
+      </p:grpSpPr>
       <p:sp>
         <p:nvSpPr>
           <p:cNvPr id="2" name="Rounded Rectangle 1"/>
@@ -10159,6 +10140,7 @@
           <a:lstStyle/>
           <a:p>
             <a:pPr algn="ctr"/>
+            <a:endParaRPr/>
           </a:p>
         </p:txBody>
       </p:sp>
@@ -10330,6 +10312,7 @@
           <a:lstStyle/>
           <a:p>
             <a:pPr algn="ctr"/>
+            <a:endParaRPr/>
           </a:p>
         </p:txBody>
       </p:sp>
@@ -10469,6 +10452,7 @@
           <a:lstStyle/>
           <a:p>
             <a:pPr algn="ctr"/>
+            <a:endParaRPr/>
           </a:p>
         </p:txBody>
       </p:sp>
@@ -10575,7 +10559,7 @@
 </file>
 
 <file path=ppt/slides/slide17.xml><?xml version="1.0" encoding="utf-8"?>
-<p:sld xmlns:a="http://schemas.openxmlformats.org/drawingml/2006/main" xmlns:p="http://schemas.openxmlformats.org/presentationml/2006/main" xmlns:r="http://schemas.openxmlformats.org/officeDocument/2006/relationships">
+<p:sld xmlns:a="http://schemas.openxmlformats.org/drawingml/2006/main" xmlns:r="http://schemas.openxmlformats.org/officeDocument/2006/relationships" xmlns:p="http://schemas.openxmlformats.org/presentationml/2006/main">
   <p:cSld>
     <p:bg>
       <p:bgPr>
@@ -10591,7 +10575,14 @@
         <p:cNvGrpSpPr/>
         <p:nvPr/>
       </p:nvGrpSpPr>
-      <p:grpSpPr/>
+      <p:grpSpPr>
+        <a:xfrm>
+          <a:off x="0" y="0"/>
+          <a:ext cx="0" cy="0"/>
+          <a:chOff x="0" y="0"/>
+          <a:chExt cx="0" cy="0"/>
+        </a:xfrm>
+      </p:grpSpPr>
       <p:sp>
         <p:nvSpPr>
           <p:cNvPr id="2" name="Rounded Rectangle 1"/>
@@ -10760,6 +10751,7 @@
           <a:lstStyle/>
           <a:p>
             <a:pPr algn="ctr"/>
+            <a:endParaRPr/>
           </a:p>
         </p:txBody>
       </p:sp>
@@ -10947,6 +10939,7 @@
           <a:lstStyle/>
           <a:p>
             <a:pPr algn="ctr"/>
+            <a:endParaRPr/>
           </a:p>
         </p:txBody>
       </p:sp>
@@ -11086,6 +11079,7 @@
           <a:lstStyle/>
           <a:p>
             <a:pPr algn="ctr"/>
+            <a:endParaRPr/>
           </a:p>
         </p:txBody>
       </p:sp>
@@ -11192,7 +11186,7 @@
 </file>
 
 <file path=ppt/slides/slide18.xml><?xml version="1.0" encoding="utf-8"?>
-<p:sld xmlns:a="http://schemas.openxmlformats.org/drawingml/2006/main" xmlns:p="http://schemas.openxmlformats.org/presentationml/2006/main" xmlns:r="http://schemas.openxmlformats.org/officeDocument/2006/relationships">
+<p:sld xmlns:a="http://schemas.openxmlformats.org/drawingml/2006/main" xmlns:r="http://schemas.openxmlformats.org/officeDocument/2006/relationships" xmlns:p="http://schemas.openxmlformats.org/presentationml/2006/main">
   <p:cSld>
     <p:bg>
       <p:bgPr>
@@ -11208,7 +11202,14 @@
         <p:cNvGrpSpPr/>
         <p:nvPr/>
       </p:nvGrpSpPr>
-      <p:grpSpPr/>
+      <p:grpSpPr>
+        <a:xfrm>
+          <a:off x="0" y="0"/>
+          <a:ext cx="0" cy="0"/>
+          <a:chOff x="0" y="0"/>
+          <a:chExt cx="0" cy="0"/>
+        </a:xfrm>
+      </p:grpSpPr>
       <p:sp>
         <p:nvSpPr>
           <p:cNvPr id="2" name="Rounded Rectangle 1"/>
@@ -11377,6 +11378,7 @@
           <a:lstStyle/>
           <a:p>
             <a:pPr algn="ctr"/>
+            <a:endParaRPr/>
           </a:p>
         </p:txBody>
       </p:sp>
@@ -11564,6 +11566,7 @@
           <a:lstStyle/>
           <a:p>
             <a:pPr algn="ctr"/>
+            <a:endParaRPr/>
           </a:p>
         </p:txBody>
       </p:sp>
@@ -11702,7 +11705,7 @@
 </file>
 
 <file path=ppt/slides/slide19.xml><?xml version="1.0" encoding="utf-8"?>
-<p:sld xmlns:a="http://schemas.openxmlformats.org/drawingml/2006/main" xmlns:p="http://schemas.openxmlformats.org/presentationml/2006/main" xmlns:r="http://schemas.openxmlformats.org/officeDocument/2006/relationships">
+<p:sld xmlns:a="http://schemas.openxmlformats.org/drawingml/2006/main" xmlns:r="http://schemas.openxmlformats.org/officeDocument/2006/relationships" xmlns:p="http://schemas.openxmlformats.org/presentationml/2006/main">
   <p:cSld>
     <p:bg>
       <p:bgPr>
@@ -11718,7 +11721,14 @@
         <p:cNvGrpSpPr/>
         <p:nvPr/>
       </p:nvGrpSpPr>
-      <p:grpSpPr/>
+      <p:grpSpPr>
+        <a:xfrm>
+          <a:off x="0" y="0"/>
+          <a:ext cx="0" cy="0"/>
+          <a:chOff x="0" y="0"/>
+          <a:chExt cx="0" cy="0"/>
+        </a:xfrm>
+      </p:grpSpPr>
       <p:sp>
         <p:nvSpPr>
           <p:cNvPr id="2" name="Rounded Rectangle 1"/>
@@ -11887,6 +11897,7 @@
           <a:lstStyle/>
           <a:p>
             <a:pPr algn="ctr"/>
+            <a:endParaRPr/>
           </a:p>
         </p:txBody>
       </p:sp>
@@ -12042,6 +12053,7 @@
           <a:lstStyle/>
           <a:p>
             <a:pPr algn="ctr"/>
+            <a:endParaRPr/>
           </a:p>
         </p:txBody>
       </p:sp>
@@ -12180,7 +12192,7 @@
 </file>
 
 <file path=ppt/slides/slide2.xml><?xml version="1.0" encoding="utf-8"?>
-<p:sld xmlns:a="http://schemas.openxmlformats.org/drawingml/2006/main" xmlns:p="http://schemas.openxmlformats.org/presentationml/2006/main" xmlns:r="http://schemas.openxmlformats.org/officeDocument/2006/relationships">
+<p:sld xmlns:a="http://schemas.openxmlformats.org/drawingml/2006/main" xmlns:r="http://schemas.openxmlformats.org/officeDocument/2006/relationships" xmlns:p="http://schemas.openxmlformats.org/presentationml/2006/main">
   <p:cSld>
     <p:bg>
       <p:bgPr>
@@ -12196,7 +12208,14 @@
         <p:cNvGrpSpPr/>
         <p:nvPr/>
       </p:nvGrpSpPr>
-      <p:grpSpPr/>
+      <p:grpSpPr>
+        <a:xfrm>
+          <a:off x="0" y="0"/>
+          <a:ext cx="0" cy="0"/>
+          <a:chOff x="0" y="0"/>
+          <a:chExt cx="0" cy="0"/>
+        </a:xfrm>
+      </p:grpSpPr>
       <p:sp>
         <p:nvSpPr>
           <p:cNvPr id="2" name="Rounded Rectangle 1"/>
@@ -12365,6 +12384,7 @@
           <a:lstStyle/>
           <a:p>
             <a:pPr algn="ctr"/>
+            <a:endParaRPr/>
           </a:p>
         </p:txBody>
       </p:sp>
@@ -12520,6 +12540,7 @@
           <a:lstStyle/>
           <a:p>
             <a:pPr algn="ctr"/>
+            <a:endParaRPr/>
           </a:p>
         </p:txBody>
       </p:sp>
@@ -12642,7 +12663,7 @@
 </file>
 
 <file path=ppt/slides/slide20.xml><?xml version="1.0" encoding="utf-8"?>
-<p:sld xmlns:a="http://schemas.openxmlformats.org/drawingml/2006/main" xmlns:p="http://schemas.openxmlformats.org/presentationml/2006/main" xmlns:r="http://schemas.openxmlformats.org/officeDocument/2006/relationships">
+<p:sld xmlns:a="http://schemas.openxmlformats.org/drawingml/2006/main" xmlns:r="http://schemas.openxmlformats.org/officeDocument/2006/relationships" xmlns:p="http://schemas.openxmlformats.org/presentationml/2006/main">
   <p:cSld>
     <p:bg>
       <p:bgPr>
@@ -12658,7 +12679,14 @@
         <p:cNvGrpSpPr/>
         <p:nvPr/>
       </p:nvGrpSpPr>
-      <p:grpSpPr/>
+      <p:grpSpPr>
+        <a:xfrm>
+          <a:off x="0" y="0"/>
+          <a:ext cx="0" cy="0"/>
+          <a:chOff x="0" y="0"/>
+          <a:chExt cx="0" cy="0"/>
+        </a:xfrm>
+      </p:grpSpPr>
       <p:sp>
         <p:nvSpPr>
           <p:cNvPr id="2" name="Rounded Rectangle 1"/>
@@ -12827,6 +12855,7 @@
           <a:lstStyle/>
           <a:p>
             <a:pPr algn="ctr"/>
+            <a:endParaRPr/>
           </a:p>
         </p:txBody>
       </p:sp>
@@ -13014,6 +13043,7 @@
           <a:lstStyle/>
           <a:p>
             <a:pPr algn="ctr"/>
+            <a:endParaRPr/>
           </a:p>
         </p:txBody>
       </p:sp>
@@ -13201,6 +13231,7 @@
           <a:lstStyle/>
           <a:p>
             <a:pPr algn="ctr"/>
+            <a:endParaRPr/>
           </a:p>
         </p:txBody>
       </p:sp>
@@ -13307,7 +13338,7 @@
 </file>
 
 <file path=ppt/slides/slide21.xml><?xml version="1.0" encoding="utf-8"?>
-<p:sld xmlns:a="http://schemas.openxmlformats.org/drawingml/2006/main" xmlns:p="http://schemas.openxmlformats.org/presentationml/2006/main" xmlns:r="http://schemas.openxmlformats.org/officeDocument/2006/relationships">
+<p:sld xmlns:a="http://schemas.openxmlformats.org/drawingml/2006/main" xmlns:r="http://schemas.openxmlformats.org/officeDocument/2006/relationships" xmlns:p="http://schemas.openxmlformats.org/presentationml/2006/main">
   <p:cSld>
     <p:bg>
       <p:bgPr>
@@ -13323,7 +13354,14 @@
         <p:cNvGrpSpPr/>
         <p:nvPr/>
       </p:nvGrpSpPr>
-      <p:grpSpPr/>
+      <p:grpSpPr>
+        <a:xfrm>
+          <a:off x="0" y="0"/>
+          <a:ext cx="0" cy="0"/>
+          <a:chOff x="0" y="0"/>
+          <a:chExt cx="0" cy="0"/>
+        </a:xfrm>
+      </p:grpSpPr>
       <p:sp>
         <p:nvSpPr>
           <p:cNvPr id="2" name="Rounded Rectangle 1"/>
@@ -13492,6 +13530,7 @@
           <a:lstStyle/>
           <a:p>
             <a:pPr algn="ctr"/>
+            <a:endParaRPr/>
           </a:p>
         </p:txBody>
       </p:sp>
@@ -13663,6 +13702,7 @@
           <a:lstStyle/>
           <a:p>
             <a:pPr algn="ctr"/>
+            <a:endParaRPr/>
           </a:p>
         </p:txBody>
       </p:sp>
@@ -13817,7 +13857,7 @@
 </file>
 
 <file path=ppt/slides/slide22.xml><?xml version="1.0" encoding="utf-8"?>
-<p:sld xmlns:a="http://schemas.openxmlformats.org/drawingml/2006/main" xmlns:p="http://schemas.openxmlformats.org/presentationml/2006/main" xmlns:r="http://schemas.openxmlformats.org/officeDocument/2006/relationships">
+<p:sld xmlns:a="http://schemas.openxmlformats.org/drawingml/2006/main" xmlns:r="http://schemas.openxmlformats.org/officeDocument/2006/relationships" xmlns:p="http://schemas.openxmlformats.org/presentationml/2006/main">
   <p:cSld>
     <p:bg>
       <p:bgPr>
@@ -13833,7 +13873,14 @@
         <p:cNvGrpSpPr/>
         <p:nvPr/>
       </p:nvGrpSpPr>
-      <p:grpSpPr/>
+      <p:grpSpPr>
+        <a:xfrm>
+          <a:off x="0" y="0"/>
+          <a:ext cx="0" cy="0"/>
+          <a:chOff x="0" y="0"/>
+          <a:chExt cx="0" cy="0"/>
+        </a:xfrm>
+      </p:grpSpPr>
       <p:sp>
         <p:nvSpPr>
           <p:cNvPr id="2" name="Rounded Rectangle 1"/>
@@ -14002,6 +14049,7 @@
           <a:lstStyle/>
           <a:p>
             <a:pPr algn="ctr"/>
+            <a:endParaRPr/>
           </a:p>
         </p:txBody>
       </p:sp>
@@ -14205,6 +14253,7 @@
           <a:lstStyle/>
           <a:p>
             <a:pPr algn="ctr"/>
+            <a:endParaRPr/>
           </a:p>
         </p:txBody>
       </p:sp>
@@ -14311,7 +14360,7 @@
 </file>
 
 <file path=ppt/slides/slide23.xml><?xml version="1.0" encoding="utf-8"?>
-<p:sld xmlns:a="http://schemas.openxmlformats.org/drawingml/2006/main" xmlns:p="http://schemas.openxmlformats.org/presentationml/2006/main" xmlns:r="http://schemas.openxmlformats.org/officeDocument/2006/relationships">
+<p:sld xmlns:a="http://schemas.openxmlformats.org/drawingml/2006/main" xmlns:r="http://schemas.openxmlformats.org/officeDocument/2006/relationships" xmlns:p="http://schemas.openxmlformats.org/presentationml/2006/main">
   <p:cSld>
     <p:bg>
       <p:bgPr>
@@ -14327,7 +14376,14 @@
         <p:cNvGrpSpPr/>
         <p:nvPr/>
       </p:nvGrpSpPr>
-      <p:grpSpPr/>
+      <p:grpSpPr>
+        <a:xfrm>
+          <a:off x="0" y="0"/>
+          <a:ext cx="0" cy="0"/>
+          <a:chOff x="0" y="0"/>
+          <a:chExt cx="0" cy="0"/>
+        </a:xfrm>
+      </p:grpSpPr>
       <p:sp>
         <p:nvSpPr>
           <p:cNvPr id="2" name="Rounded Rectangle 1"/>
@@ -14496,6 +14552,7 @@
           <a:lstStyle/>
           <a:p>
             <a:pPr algn="ctr"/>
+            <a:endParaRPr/>
           </a:p>
         </p:txBody>
       </p:sp>
@@ -14635,6 +14692,7 @@
           <a:lstStyle/>
           <a:p>
             <a:pPr algn="ctr"/>
+            <a:endParaRPr/>
           </a:p>
         </p:txBody>
       </p:sp>
@@ -14741,7 +14799,7 @@
 </file>
 
 <file path=ppt/slides/slide3.xml><?xml version="1.0" encoding="utf-8"?>
-<p:sld xmlns:a="http://schemas.openxmlformats.org/drawingml/2006/main" xmlns:p="http://schemas.openxmlformats.org/presentationml/2006/main" xmlns:r="http://schemas.openxmlformats.org/officeDocument/2006/relationships">
+<p:sld xmlns:a="http://schemas.openxmlformats.org/drawingml/2006/main" xmlns:r="http://schemas.openxmlformats.org/officeDocument/2006/relationships" xmlns:p="http://schemas.openxmlformats.org/presentationml/2006/main">
   <p:cSld>
     <p:bg>
       <p:bgPr>
@@ -14757,7 +14815,14 @@
         <p:cNvGrpSpPr/>
         <p:nvPr/>
       </p:nvGrpSpPr>
-      <p:grpSpPr/>
+      <p:grpSpPr>
+        <a:xfrm>
+          <a:off x="0" y="0"/>
+          <a:ext cx="0" cy="0"/>
+          <a:chOff x="0" y="0"/>
+          <a:chExt cx="0" cy="0"/>
+        </a:xfrm>
+      </p:grpSpPr>
       <p:sp>
         <p:nvSpPr>
           <p:cNvPr id="2" name="Rounded Rectangle 1"/>
@@ -14926,6 +14991,7 @@
           <a:lstStyle/>
           <a:p>
             <a:pPr algn="ctr"/>
+            <a:endParaRPr/>
           </a:p>
         </p:txBody>
       </p:sp>
@@ -15113,6 +15179,7 @@
           <a:lstStyle/>
           <a:p>
             <a:pPr algn="ctr"/>
+            <a:endParaRPr/>
           </a:p>
         </p:txBody>
       </p:sp>
@@ -15267,7 +15334,7 @@
 </file>
 
 <file path=ppt/slides/slide4.xml><?xml version="1.0" encoding="utf-8"?>
-<p:sld xmlns:a="http://schemas.openxmlformats.org/drawingml/2006/main" xmlns:p="http://schemas.openxmlformats.org/presentationml/2006/main" xmlns:r="http://schemas.openxmlformats.org/officeDocument/2006/relationships">
+<p:sld xmlns:a="http://schemas.openxmlformats.org/drawingml/2006/main" xmlns:r="http://schemas.openxmlformats.org/officeDocument/2006/relationships" xmlns:p="http://schemas.openxmlformats.org/presentationml/2006/main">
   <p:cSld>
     <p:bg>
       <p:bgPr>
@@ -15283,7 +15350,14 @@
         <p:cNvGrpSpPr/>
         <p:nvPr/>
       </p:nvGrpSpPr>
-      <p:grpSpPr/>
+      <p:grpSpPr>
+        <a:xfrm>
+          <a:off x="0" y="0"/>
+          <a:ext cx="0" cy="0"/>
+          <a:chOff x="0" y="0"/>
+          <a:chExt cx="0" cy="0"/>
+        </a:xfrm>
+      </p:grpSpPr>
       <p:sp>
         <p:nvSpPr>
           <p:cNvPr id="2" name="Rounded Rectangle 1"/>
@@ -15452,6 +15526,7 @@
           <a:lstStyle/>
           <a:p>
             <a:pPr algn="ctr"/>
+            <a:endParaRPr/>
           </a:p>
         </p:txBody>
       </p:sp>
@@ -15623,6 +15698,7 @@
           <a:lstStyle/>
           <a:p>
             <a:pPr algn="ctr"/>
+            <a:endParaRPr/>
           </a:p>
         </p:txBody>
       </p:sp>
@@ -15794,6 +15870,7 @@
           <a:lstStyle/>
           <a:p>
             <a:pPr algn="ctr"/>
+            <a:endParaRPr/>
           </a:p>
         </p:txBody>
       </p:sp>
@@ -15965,6 +16042,7 @@
           <a:lstStyle/>
           <a:p>
             <a:pPr algn="ctr"/>
+            <a:endParaRPr/>
           </a:p>
         </p:txBody>
       </p:sp>
@@ -16136,6 +16214,7 @@
           <a:lstStyle/>
           <a:p>
             <a:pPr algn="ctr"/>
+            <a:endParaRPr/>
           </a:p>
         </p:txBody>
       </p:sp>
@@ -16258,7 +16337,7 @@
 </file>
 
 <file path=ppt/slides/slide5.xml><?xml version="1.0" encoding="utf-8"?>
-<p:sld xmlns:a="http://schemas.openxmlformats.org/drawingml/2006/main" xmlns:p="http://schemas.openxmlformats.org/presentationml/2006/main" xmlns:r="http://schemas.openxmlformats.org/officeDocument/2006/relationships">
+<p:sld xmlns:a="http://schemas.openxmlformats.org/drawingml/2006/main" xmlns:r="http://schemas.openxmlformats.org/officeDocument/2006/relationships" xmlns:p="http://schemas.openxmlformats.org/presentationml/2006/main">
   <p:cSld>
     <p:bg>
       <p:bgPr>
@@ -16274,7 +16353,14 @@
         <p:cNvGrpSpPr/>
         <p:nvPr/>
       </p:nvGrpSpPr>
-      <p:grpSpPr/>
+      <p:grpSpPr>
+        <a:xfrm>
+          <a:off x="0" y="0"/>
+          <a:ext cx="0" cy="0"/>
+          <a:chOff x="0" y="0"/>
+          <a:chExt cx="0" cy="0"/>
+        </a:xfrm>
+      </p:grpSpPr>
       <p:sp>
         <p:nvSpPr>
           <p:cNvPr id="2" name="Rounded Rectangle 1"/>
@@ -16443,6 +16529,7 @@
           <a:lstStyle/>
           <a:p>
             <a:pPr algn="ctr"/>
+            <a:endParaRPr/>
           </a:p>
         </p:txBody>
       </p:sp>
@@ -16630,6 +16717,7 @@
           <a:lstStyle/>
           <a:p>
             <a:pPr algn="ctr"/>
+            <a:endParaRPr/>
           </a:p>
         </p:txBody>
       </p:sp>
@@ -16817,6 +16905,7 @@
           <a:lstStyle/>
           <a:p>
             <a:pPr algn="ctr"/>
+            <a:endParaRPr/>
           </a:p>
         </p:txBody>
       </p:sp>
@@ -17004,6 +17093,7 @@
           <a:lstStyle/>
           <a:p>
             <a:pPr algn="ctr"/>
+            <a:endParaRPr/>
           </a:p>
         </p:txBody>
       </p:sp>
@@ -17142,7 +17232,7 @@
 </file>
 
 <file path=ppt/slides/slide6.xml><?xml version="1.0" encoding="utf-8"?>
-<p:sld xmlns:a="http://schemas.openxmlformats.org/drawingml/2006/main" xmlns:p="http://schemas.openxmlformats.org/presentationml/2006/main" xmlns:r="http://schemas.openxmlformats.org/officeDocument/2006/relationships">
+<p:sld xmlns:a="http://schemas.openxmlformats.org/drawingml/2006/main" xmlns:r="http://schemas.openxmlformats.org/officeDocument/2006/relationships" xmlns:p="http://schemas.openxmlformats.org/presentationml/2006/main">
   <p:cSld>
     <p:bg>
       <p:bgPr>
@@ -17158,7 +17248,14 @@
         <p:cNvGrpSpPr/>
         <p:nvPr/>
       </p:nvGrpSpPr>
-      <p:grpSpPr/>
+      <p:grpSpPr>
+        <a:xfrm>
+          <a:off x="0" y="0"/>
+          <a:ext cx="0" cy="0"/>
+          <a:chOff x="0" y="0"/>
+          <a:chExt cx="0" cy="0"/>
+        </a:xfrm>
+      </p:grpSpPr>
       <p:sp>
         <p:nvSpPr>
           <p:cNvPr id="2" name="Rounded Rectangle 1"/>
@@ -17327,6 +17424,7 @@
           <a:lstStyle/>
           <a:p>
             <a:pPr algn="ctr"/>
+            <a:endParaRPr/>
           </a:p>
         </p:txBody>
       </p:sp>
@@ -17482,6 +17580,7 @@
           <a:lstStyle/>
           <a:p>
             <a:pPr algn="ctr"/>
+            <a:endParaRPr/>
           </a:p>
         </p:txBody>
       </p:sp>
@@ -17637,6 +17736,7 @@
           <a:lstStyle/>
           <a:p>
             <a:pPr algn="ctr"/>
+            <a:endParaRPr/>
           </a:p>
         </p:txBody>
       </p:sp>
@@ -17743,7 +17843,7 @@
 </file>
 
 <file path=ppt/slides/slide7.xml><?xml version="1.0" encoding="utf-8"?>
-<p:sld xmlns:a="http://schemas.openxmlformats.org/drawingml/2006/main" xmlns:p="http://schemas.openxmlformats.org/presentationml/2006/main" xmlns:r="http://schemas.openxmlformats.org/officeDocument/2006/relationships">
+<p:sld xmlns:a="http://schemas.openxmlformats.org/drawingml/2006/main" xmlns:r="http://schemas.openxmlformats.org/officeDocument/2006/relationships" xmlns:p="http://schemas.openxmlformats.org/presentationml/2006/main">
   <p:cSld>
     <p:bg>
       <p:bgPr>
@@ -17759,7 +17859,14 @@
         <p:cNvGrpSpPr/>
         <p:nvPr/>
       </p:nvGrpSpPr>
-      <p:grpSpPr/>
+      <p:grpSpPr>
+        <a:xfrm>
+          <a:off x="0" y="0"/>
+          <a:ext cx="0" cy="0"/>
+          <a:chOff x="0" y="0"/>
+          <a:chExt cx="0" cy="0"/>
+        </a:xfrm>
+      </p:grpSpPr>
       <p:sp>
         <p:nvSpPr>
           <p:cNvPr id="2" name="Rounded Rectangle 1"/>
@@ -17928,6 +18035,7 @@
           <a:lstStyle/>
           <a:p>
             <a:pPr algn="ctr"/>
+            <a:endParaRPr/>
           </a:p>
         </p:txBody>
       </p:sp>
@@ -18099,6 +18207,7 @@
           <a:lstStyle/>
           <a:p>
             <a:pPr algn="ctr"/>
+            <a:endParaRPr/>
           </a:p>
         </p:txBody>
       </p:sp>
@@ -18253,7 +18362,7 @@
 </file>
 
 <file path=ppt/slides/slide8.xml><?xml version="1.0" encoding="utf-8"?>
-<p:sld xmlns:a="http://schemas.openxmlformats.org/drawingml/2006/main" xmlns:p="http://schemas.openxmlformats.org/presentationml/2006/main" xmlns:r="http://schemas.openxmlformats.org/officeDocument/2006/relationships">
+<p:sld xmlns:a="http://schemas.openxmlformats.org/drawingml/2006/main" xmlns:r="http://schemas.openxmlformats.org/officeDocument/2006/relationships" xmlns:p="http://schemas.openxmlformats.org/presentationml/2006/main">
   <p:cSld>
     <p:bg>
       <p:bgPr>
@@ -18269,7 +18378,14 @@
         <p:cNvGrpSpPr/>
         <p:nvPr/>
       </p:nvGrpSpPr>
-      <p:grpSpPr/>
+      <p:grpSpPr>
+        <a:xfrm>
+          <a:off x="0" y="0"/>
+          <a:ext cx="0" cy="0"/>
+          <a:chOff x="0" y="0"/>
+          <a:chExt cx="0" cy="0"/>
+        </a:xfrm>
+      </p:grpSpPr>
       <p:sp>
         <p:nvSpPr>
           <p:cNvPr id="2" name="Rounded Rectangle 1"/>
@@ -18438,6 +18554,7 @@
           <a:lstStyle/>
           <a:p>
             <a:pPr algn="ctr"/>
+            <a:endParaRPr/>
           </a:p>
         </p:txBody>
       </p:sp>
@@ -18609,6 +18726,7 @@
           <a:lstStyle/>
           <a:p>
             <a:pPr algn="ctr"/>
+            <a:endParaRPr/>
           </a:p>
         </p:txBody>
       </p:sp>
@@ -18780,6 +18898,7 @@
           <a:lstStyle/>
           <a:p>
             <a:pPr algn="ctr"/>
+            <a:endParaRPr/>
           </a:p>
         </p:txBody>
       </p:sp>
@@ -18951,6 +19070,7 @@
           <a:lstStyle/>
           <a:p>
             <a:pPr algn="ctr"/>
+            <a:endParaRPr/>
           </a:p>
         </p:txBody>
       </p:sp>
@@ -19105,7 +19225,7 @@
 </file>
 
 <file path=ppt/slides/slide9.xml><?xml version="1.0" encoding="utf-8"?>
-<p:sld xmlns:a="http://schemas.openxmlformats.org/drawingml/2006/main" xmlns:p="http://schemas.openxmlformats.org/presentationml/2006/main" xmlns:r="http://schemas.openxmlformats.org/officeDocument/2006/relationships">
+<p:sld xmlns:a="http://schemas.openxmlformats.org/drawingml/2006/main" xmlns:r="http://schemas.openxmlformats.org/officeDocument/2006/relationships" xmlns:p="http://schemas.openxmlformats.org/presentationml/2006/main">
   <p:cSld>
     <p:bg>
       <p:bgPr>
@@ -19121,7 +19241,14 @@
         <p:cNvGrpSpPr/>
         <p:nvPr/>
       </p:nvGrpSpPr>
-      <p:grpSpPr/>
+      <p:grpSpPr>
+        <a:xfrm>
+          <a:off x="0" y="0"/>
+          <a:ext cx="0" cy="0"/>
+          <a:chOff x="0" y="0"/>
+          <a:chExt cx="0" cy="0"/>
+        </a:xfrm>
+      </p:grpSpPr>
       <p:sp>
         <p:nvSpPr>
           <p:cNvPr id="2" name="Rounded Rectangle 1"/>
@@ -19290,6 +19417,7 @@
           <a:lstStyle/>
           <a:p>
             <a:pPr algn="ctr"/>
+            <a:endParaRPr/>
           </a:p>
         </p:txBody>
       </p:sp>
@@ -19477,6 +19605,7 @@
           <a:lstStyle/>
           <a:p>
             <a:pPr algn="ctr"/>
+            <a:endParaRPr/>
           </a:p>
         </p:txBody>
       </p:sp>
@@ -19648,6 +19777,7 @@
           <a:lstStyle/>
           <a:p>
             <a:pPr algn="ctr"/>
+            <a:endParaRPr/>
           </a:p>
         </p:txBody>
       </p:sp>
@@ -20084,44 +20214,44 @@
         <a:sysClr val="window" lastClr="FFFFFF"/>
       </a:lt1>
       <a:dk2>
-        <a:srgbClr val="1F497D"/>
+        <a:srgbClr val="0E2841"/>
       </a:dk2>
       <a:lt2>
-        <a:srgbClr val="EEECE1"/>
+        <a:srgbClr val="E8E8E8"/>
       </a:lt2>
       <a:accent1>
-        <a:srgbClr val="4F81BD"/>
+        <a:srgbClr val="156082"/>
       </a:accent1>
       <a:accent2>
-        <a:srgbClr val="C0504D"/>
+        <a:srgbClr val="E97132"/>
       </a:accent2>
       <a:accent3>
-        <a:srgbClr val="9BBB59"/>
+        <a:srgbClr val="196B24"/>
       </a:accent3>
       <a:accent4>
-        <a:srgbClr val="8064A2"/>
+        <a:srgbClr val="0F9ED5"/>
       </a:accent4>
       <a:accent5>
-        <a:srgbClr val="4BACC6"/>
+        <a:srgbClr val="A02B93"/>
       </a:accent5>
       <a:accent6>
-        <a:srgbClr val="F79646"/>
+        <a:srgbClr val="4EA72E"/>
       </a:accent6>
       <a:hlink>
-        <a:srgbClr val="0000FF"/>
+        <a:srgbClr val="467886"/>
       </a:hlink>
       <a:folHlink>
-        <a:srgbClr val="800080"/>
+        <a:srgbClr val="96607D"/>
       </a:folHlink>
     </a:clrScheme>
     <a:fontScheme name="Office">
       <a:majorFont>
-        <a:latin typeface="Calibri"/>
+        <a:latin typeface="Aptos Display" panose="02110004020202020204"/>
         <a:ea typeface=""/>
         <a:cs typeface=""/>
-        <a:font script="Jpan" typeface="ＭＳ Ｐゴシック"/>
+        <a:font script="Jpan" typeface="游ゴシック Light"/>
         <a:font script="Hang" typeface="맑은 고딕"/>
-        <a:font script="Hans" typeface="宋体"/>
+        <a:font script="Hans" typeface="等线 Light"/>
         <a:font script="Hant" typeface="新細明體"/>
         <a:font script="Arab" typeface="Times New Roman"/>
         <a:font script="Hebr" typeface="Times New Roman"/>
@@ -20149,14 +20279,31 @@
         <a:font script="Viet" typeface="Times New Roman"/>
         <a:font script="Uigh" typeface="Microsoft Uighur"/>
         <a:font script="Geor" typeface="Sylfaen"/>
+        <a:font script="Armn" typeface="Arial"/>
+        <a:font script="Bugi" typeface="Leelawadee UI"/>
+        <a:font script="Bopo" typeface="Microsoft JhengHei"/>
+        <a:font script="Java" typeface="Javanese Text"/>
+        <a:font script="Lisu" typeface="Segoe UI"/>
+        <a:font script="Mymr" typeface="Myanmar Text"/>
+        <a:font script="Nkoo" typeface="Ebrima"/>
+        <a:font script="Olck" typeface="Nirmala UI"/>
+        <a:font script="Osma" typeface="Ebrima"/>
+        <a:font script="Phag" typeface="Phagspa"/>
+        <a:font script="Syrn" typeface="Estrangelo Edessa"/>
+        <a:font script="Syrj" typeface="Estrangelo Edessa"/>
+        <a:font script="Syre" typeface="Estrangelo Edessa"/>
+        <a:font script="Sora" typeface="Nirmala UI"/>
+        <a:font script="Tale" typeface="Microsoft Tai Le"/>
+        <a:font script="Talu" typeface="Microsoft New Tai Lue"/>
+        <a:font script="Tfng" typeface="Ebrima"/>
       </a:majorFont>
       <a:minorFont>
-        <a:latin typeface="Calibri"/>
+        <a:latin typeface="Aptos" panose="02110004020202020204"/>
         <a:ea typeface=""/>
         <a:cs typeface=""/>
-        <a:font script="Jpan" typeface="ＭＳ Ｐゴシック"/>
+        <a:font script="Jpan" typeface="游ゴシック"/>
         <a:font script="Hang" typeface="맑은 고딕"/>
-        <a:font script="Hans" typeface="宋体"/>
+        <a:font script="Hans" typeface="等线"/>
         <a:font script="Hant" typeface="新細明體"/>
         <a:font script="Arab" typeface="Arial"/>
         <a:font script="Hebr" typeface="Arial"/>
@@ -20184,6 +20331,23 @@
         <a:font script="Viet" typeface="Arial"/>
         <a:font script="Uigh" typeface="Microsoft Uighur"/>
         <a:font script="Geor" typeface="Sylfaen"/>
+        <a:font script="Armn" typeface="Arial"/>
+        <a:font script="Bugi" typeface="Leelawadee UI"/>
+        <a:font script="Bopo" typeface="Microsoft JhengHei"/>
+        <a:font script="Java" typeface="Javanese Text"/>
+        <a:font script="Lisu" typeface="Segoe UI"/>
+        <a:font script="Mymr" typeface="Myanmar Text"/>
+        <a:font script="Nkoo" typeface="Ebrima"/>
+        <a:font script="Olck" typeface="Nirmala UI"/>
+        <a:font script="Osma" typeface="Ebrima"/>
+        <a:font script="Phag" typeface="Phagspa"/>
+        <a:font script="Syrn" typeface="Estrangelo Edessa"/>
+        <a:font script="Syrj" typeface="Estrangelo Edessa"/>
+        <a:font script="Syre" typeface="Estrangelo Edessa"/>
+        <a:font script="Sora" typeface="Nirmala UI"/>
+        <a:font script="Tale" typeface="Microsoft Tai Le"/>
+        <a:font script="Talu" typeface="Microsoft New Tai Lue"/>
+        <a:font script="Tfng" typeface="Ebrima"/>
       </a:minorFont>
     </a:fontScheme>
     <a:fmtScheme name="Office">
@@ -20195,180 +20359,136 @@
           <a:gsLst>
             <a:gs pos="0">
               <a:schemeClr val="phClr">
-                <a:tint val="50000"/>
-                <a:satMod val="300000"/>
+                <a:lumMod val="110000"/>
+                <a:satMod val="105000"/>
+                <a:tint val="67000"/>
               </a:schemeClr>
             </a:gs>
-            <a:gs pos="35000">
+            <a:gs pos="50000">
               <a:schemeClr val="phClr">
-                <a:tint val="37000"/>
-                <a:satMod val="300000"/>
+                <a:lumMod val="105000"/>
+                <a:satMod val="103000"/>
+                <a:tint val="73000"/>
               </a:schemeClr>
             </a:gs>
             <a:gs pos="100000">
               <a:schemeClr val="phClr">
-                <a:tint val="15000"/>
-                <a:satMod val="350000"/>
+                <a:lumMod val="105000"/>
+                <a:satMod val="109000"/>
+                <a:tint val="81000"/>
               </a:schemeClr>
             </a:gs>
           </a:gsLst>
-          <a:lin ang="16200000" scaled="1"/>
+          <a:lin ang="5400000" scaled="0"/>
         </a:gradFill>
         <a:gradFill rotWithShape="1">
           <a:gsLst>
             <a:gs pos="0">
               <a:schemeClr val="phClr">
-                <a:tint val="100000"/>
+                <a:satMod val="103000"/>
+                <a:lumMod val="102000"/>
+                <a:tint val="94000"/>
+              </a:schemeClr>
+            </a:gs>
+            <a:gs pos="50000">
+              <a:schemeClr val="phClr">
+                <a:satMod val="110000"/>
+                <a:lumMod val="100000"/>
                 <a:shade val="100000"/>
-                <a:satMod val="130000"/>
               </a:schemeClr>
             </a:gs>
             <a:gs pos="100000">
               <a:schemeClr val="phClr">
-                <a:tint val="50000"/>
-                <a:shade val="100000"/>
-                <a:satMod val="350000"/>
+                <a:lumMod val="99000"/>
+                <a:satMod val="120000"/>
+                <a:shade val="78000"/>
               </a:schemeClr>
             </a:gs>
           </a:gsLst>
-          <a:lin ang="16200000" scaled="0"/>
+          <a:lin ang="5400000" scaled="0"/>
         </a:gradFill>
       </a:fillStyleLst>
       <a:lnStyleLst>
-        <a:ln w="9525" cap="flat" cmpd="sng" algn="ctr">
+        <a:ln w="12700" cap="flat" cmpd="sng" algn="ctr">
           <a:solidFill>
-            <a:schemeClr val="phClr">
-              <a:shade val="95000"/>
-              <a:satMod val="105000"/>
-            </a:schemeClr>
+            <a:schemeClr val="phClr"/>
           </a:solidFill>
           <a:prstDash val="solid"/>
+          <a:miter lim="800000"/>
+        </a:ln>
+        <a:ln w="19050" cap="flat" cmpd="sng" algn="ctr">
+          <a:solidFill>
+            <a:schemeClr val="phClr"/>
+          </a:solidFill>
+          <a:prstDash val="solid"/>
+          <a:miter lim="800000"/>
         </a:ln>
         <a:ln w="25400" cap="flat" cmpd="sng" algn="ctr">
           <a:solidFill>
             <a:schemeClr val="phClr"/>
           </a:solidFill>
           <a:prstDash val="solid"/>
-        </a:ln>
-        <a:ln w="38100" cap="flat" cmpd="sng" algn="ctr">
-          <a:solidFill>
-            <a:schemeClr val="phClr"/>
-          </a:solidFill>
-          <a:prstDash val="solid"/>
+          <a:miter lim="800000"/>
         </a:ln>
       </a:lnStyleLst>
       <a:effectStyleLst>
         <a:effectStyle>
+          <a:effectLst/>
+        </a:effectStyle>
+        <a:effectStyle>
+          <a:effectLst/>
+        </a:effectStyle>
+        <a:effectStyle>
           <a:effectLst>
-            <a:outerShdw blurRad="40000" dist="20000" dir="5400000" rotWithShape="0">
+            <a:outerShdw blurRad="57150" dist="19050" dir="5400000" algn="ctr" rotWithShape="0">
               <a:srgbClr val="000000">
-                <a:alpha val="38000"/>
+                <a:alpha val="63000"/>
               </a:srgbClr>
             </a:outerShdw>
           </a:effectLst>
-        </a:effectStyle>
-        <a:effectStyle>
-          <a:effectLst>
-            <a:outerShdw blurRad="40000" dist="23000" dir="5400000" rotWithShape="0">
-              <a:srgbClr val="000000">
-                <a:alpha val="35000"/>
-              </a:srgbClr>
-            </a:outerShdw>
-          </a:effectLst>
-        </a:effectStyle>
-        <a:effectStyle>
-          <a:effectLst>
-            <a:outerShdw blurRad="40000" dist="23000" dir="5400000" rotWithShape="0">
-              <a:srgbClr val="000000">
-                <a:alpha val="35000"/>
-              </a:srgbClr>
-            </a:outerShdw>
-          </a:effectLst>
-          <a:scene3d>
-            <a:camera prst="orthographicFront">
-              <a:rot lat="0" lon="0" rev="0"/>
-            </a:camera>
-            <a:lightRig rig="threePt" dir="t">
-              <a:rot lat="0" lon="0" rev="1200000"/>
-            </a:lightRig>
-          </a:scene3d>
-          <a:sp3d>
-            <a:bevelT w="63500" h="25400"/>
-          </a:sp3d>
         </a:effectStyle>
       </a:effectStyleLst>
       <a:bgFillStyleLst>
         <a:solidFill>
           <a:schemeClr val="phClr"/>
         </a:solidFill>
+        <a:solidFill>
+          <a:schemeClr val="phClr">
+            <a:tint val="95000"/>
+            <a:satMod val="170000"/>
+          </a:schemeClr>
+        </a:solidFill>
         <a:gradFill rotWithShape="1">
           <a:gsLst>
             <a:gs pos="0">
               <a:schemeClr val="phClr">
-                <a:tint val="40000"/>
-                <a:satMod val="350000"/>
+                <a:tint val="93000"/>
+                <a:satMod val="150000"/>
+                <a:shade val="98000"/>
+                <a:lumMod val="102000"/>
               </a:schemeClr>
             </a:gs>
-            <a:gs pos="40000">
+            <a:gs pos="50000">
               <a:schemeClr val="phClr">
-                <a:tint val="45000"/>
-                <a:shade val="99000"/>
-                <a:satMod val="350000"/>
+                <a:tint val="98000"/>
+                <a:satMod val="130000"/>
+                <a:shade val="90000"/>
+                <a:lumMod val="103000"/>
               </a:schemeClr>
             </a:gs>
             <a:gs pos="100000">
               <a:schemeClr val="phClr">
-                <a:shade val="20000"/>
-                <a:satMod val="255000"/>
+                <a:shade val="63000"/>
+                <a:satMod val="120000"/>
               </a:schemeClr>
             </a:gs>
           </a:gsLst>
-          <a:path path="circle">
-            <a:fillToRect l="50000" t="-80000" r="50000" b="180000"/>
-          </a:path>
-        </a:gradFill>
-        <a:gradFill rotWithShape="1">
-          <a:gsLst>
-            <a:gs pos="0">
-              <a:schemeClr val="phClr">
-                <a:tint val="80000"/>
-                <a:satMod val="300000"/>
-              </a:schemeClr>
-            </a:gs>
-            <a:gs pos="100000">
-              <a:schemeClr val="phClr">
-                <a:shade val="30000"/>
-                <a:satMod val="200000"/>
-              </a:schemeClr>
-            </a:gs>
-          </a:gsLst>
-          <a:path path="circle">
-            <a:fillToRect l="50000" t="50000" r="50000" b="50000"/>
-          </a:path>
+          <a:lin ang="5400000" scaled="0"/>
         </a:gradFill>
       </a:bgFillStyleLst>
     </a:fmtScheme>
   </a:themeElements>
   <a:objectDefaults>
-    <a:spDef>
-      <a:spPr/>
-      <a:bodyPr/>
-      <a:lstStyle/>
-      <a:style>
-        <a:lnRef idx="1">
-          <a:schemeClr val="accent1"/>
-        </a:lnRef>
-        <a:fillRef idx="3">
-          <a:schemeClr val="accent1"/>
-        </a:fillRef>
-        <a:effectRef idx="2">
-          <a:schemeClr val="accent1"/>
-        </a:effectRef>
-        <a:fontRef idx="minor">
-          <a:schemeClr val="lt1"/>
-        </a:fontRef>
-      </a:style>
-    </a:spDef>
     <a:lnDef>
       <a:spPr/>
       <a:bodyPr/>
@@ -20390,5 +20510,10 @@
     </a:lnDef>
   </a:objectDefaults>
   <a:extraClrSchemeLst/>
+  <a:extLst>
+    <a:ext uri="{05A4C25C-085E-4340-85A3-A5531E510DB2}">
+      <thm15:themeFamily xmlns:thm15="http://schemas.microsoft.com/office/thememl/2012/main" name="Office Theme" id="{2E142A2C-CD16-42D6-873A-C26D2A0506FA}" vid="{1BDDFF52-6CD6-40A5-AB3C-68EB2F1E4D0A}"/>
+    </a:ext>
+  </a:extLst>
 </a:theme>
 </file>